--- a/output/114→115分行表現分析_5頁.pptx
+++ b/output/114→115分行表現分析_5頁.pptx
@@ -111,7 +111,7 @@
   <p:extLst>
     <p:ext uri="{521415D9-36F7-43E2-AB2F-B90AF26B5E84}">
       <p14:sectionLst xmlns:p14="http://schemas.microsoft.com/office/powerpoint/2010/main">
-        <p14:section name="114→115 分行表現分析" id="{5a3535ce-f843-79e4-1546-9b94c28d1acc}">
+        <p14:section name="114→115 分行表現分析" id="{dbcc2ebd-e4a2-fb6e-913f-d50febd14acb}">
           <p14:sldIdLst>
             <p14:sldId id="256"/>
             <p14:sldId id="257"/>
@@ -11211,7 +11211,7 @@
                   <a:srgbClr val="7F7F7F"/>
                 </a:solidFill>
               </a:rPr>
-              <a:t>115年年化：全行目標 117.85億 → 實績 124.86億（達成 105.9%）。整體達標掩蓋了 84 家未達成分行 8.2億 的缺口</a:t>
+              <a:t>115年年化：目標 117.85億 → 實績 124.86億（達成 105.9%），整體達標掩蓋了 84 家未達成分行 8.2億 的缺口</a:t>
             </a:r>
             <a:endParaRPr lang="en-US" sz="1300" dirty="0"/>
           </a:p>
@@ -11310,7 +11310,7 @@
         <p:spPr>
           <a:xfrm>
             <a:off x="640080" y="5166360"/>
-            <a:ext cx="1554480" cy="457200"/>
+            <a:ext cx="1554480" cy="548640"/>
           </a:xfrm>
           <a:prstGeom prst="rect">
             <a:avLst/>
@@ -11326,20 +11326,20 @@
               <a:buNone/>
             </a:pPr>
             <a:r>
-              <a:rPr lang="en-US" sz="1100" dirty="0">
+              <a:rPr lang="en-US" sz="1000" dirty="0">
                 <a:solidFill>
                   <a:srgbClr val="000000"/>
                 </a:solidFill>
               </a:rPr>
               <a:t>115年目標</a:t>
             </a:r>
-            <a:endParaRPr lang="en-US" sz="1100" dirty="0"/>
+            <a:endParaRPr lang="en-US" sz="1000" dirty="0"/>
           </a:p>
         </p:txBody>
       </p:sp>
       <p:sp>
         <p:nvSpPr>
-          <p:cNvPr id="8" name="bar 超額分行 (99家)"/>
+          <p:cNvPr id="8" name="bar 115年超額 99家 達標群52＋未達標群47"/>
           <p:cNvSpPr/>
           <p:nvPr/>
         </p:nvSpPr>
@@ -11407,7 +11407,7 @@
         <p:spPr>
           <a:xfrm>
             <a:off x="2240280" y="5166360"/>
-            <a:ext cx="1554480" cy="457200"/>
+            <a:ext cx="1554480" cy="548640"/>
           </a:xfrm>
           <a:prstGeom prst="rect">
             <a:avLst/>
@@ -11423,14 +11423,28 @@
               <a:buNone/>
             </a:pPr>
             <a:r>
-              <a:rPr lang="en-US" sz="1100" dirty="0">
+              <a:rPr lang="en-US" sz="1000" dirty="0">
                 <a:solidFill>
                   <a:srgbClr val="000000"/>
                 </a:solidFill>
               </a:rPr>
-              <a:t>超額分行 (99家)</a:t>
+              <a:t>115年超額 99家</a:t>
             </a:r>
-            <a:endParaRPr lang="en-US" sz="1100" dirty="0"/>
+            <a:endParaRPr lang="en-US" sz="1000" dirty="0"/>
+          </a:p>
+          <a:p>
+            <a:pPr algn="ctr" indent="0" marL="0">
+              <a:buNone/>
+            </a:pPr>
+            <a:r>
+              <a:rPr lang="en-US" sz="1000" dirty="0">
+                <a:solidFill>
+                  <a:srgbClr val="000000"/>
+                </a:solidFill>
+              </a:rPr>
+              <a:t>達標群52＋未達標群47</a:t>
+            </a:r>
+            <a:endParaRPr lang="en-US" sz="1000" dirty="0"/>
           </a:p>
         </p:txBody>
       </p:sp>
@@ -11459,7 +11473,7 @@
       </p:sp>
       <p:sp>
         <p:nvSpPr>
-          <p:cNvPr id="12" name="bar 未達成分行 (84家)"/>
+          <p:cNvPr id="12" name="bar 115年未達成 84家 達標群18＋未達標群66"/>
           <p:cNvSpPr/>
           <p:nvPr/>
         </p:nvSpPr>
@@ -11527,7 +11541,7 @@
         <p:spPr>
           <a:xfrm>
             <a:off x="3840480" y="5166360"/>
-            <a:ext cx="1554480" cy="457200"/>
+            <a:ext cx="1554480" cy="548640"/>
           </a:xfrm>
           <a:prstGeom prst="rect">
             <a:avLst/>
@@ -11543,14 +11557,28 @@
               <a:buNone/>
             </a:pPr>
             <a:r>
-              <a:rPr lang="en-US" sz="1100" dirty="0">
+              <a:rPr lang="en-US" sz="1000" dirty="0">
                 <a:solidFill>
                   <a:srgbClr val="000000"/>
                 </a:solidFill>
               </a:rPr>
-              <a:t>未達成分行 (84家)</a:t>
+              <a:t>115年未達成 84家</a:t>
             </a:r>
-            <a:endParaRPr lang="en-US" sz="1100" dirty="0"/>
+            <a:endParaRPr lang="en-US" sz="1000" dirty="0"/>
+          </a:p>
+          <a:p>
+            <a:pPr algn="ctr" indent="0" marL="0">
+              <a:buNone/>
+            </a:pPr>
+            <a:r>
+              <a:rPr lang="en-US" sz="1000" dirty="0">
+                <a:solidFill>
+                  <a:srgbClr val="000000"/>
+                </a:solidFill>
+              </a:rPr>
+              <a:t>達標群18＋未達標群66</a:t>
+            </a:r>
+            <a:endParaRPr lang="en-US" sz="1000" dirty="0"/>
           </a:p>
         </p:txBody>
       </p:sp>
@@ -11647,7 +11675,7 @@
         <p:spPr>
           <a:xfrm>
             <a:off x="5440680" y="5166360"/>
-            <a:ext cx="1554480" cy="457200"/>
+            <a:ext cx="1554480" cy="548640"/>
           </a:xfrm>
           <a:prstGeom prst="rect">
             <a:avLst/>
@@ -11663,14 +11691,14 @@
               <a:buNone/>
             </a:pPr>
             <a:r>
-              <a:rPr lang="en-US" sz="1100" dirty="0">
+              <a:rPr lang="en-US" sz="1000" dirty="0">
                 <a:solidFill>
                   <a:srgbClr val="000000"/>
                 </a:solidFill>
               </a:rPr>
               <a:t>115年年化實績</a:t>
             </a:r>
-            <a:endParaRPr lang="en-US" sz="1100" dirty="0"/>
+            <a:endParaRPr lang="en-US" sz="1000" dirty="0"/>
           </a:p>
         </p:txBody>
       </p:sp>
@@ -11682,8 +11710,8 @@
         </p:nvSpPr>
         <p:spPr>
           <a:xfrm>
-            <a:off x="822960" y="5623560"/>
-            <a:ext cx="6035040" cy="228600"/>
+            <a:off x="548640" y="5760720"/>
+            <a:ext cx="6309360" cy="502920"/>
           </a:xfrm>
           <a:prstGeom prst="rect">
             <a:avLst/>
@@ -11694,6 +11722,20 @@
         <p:txBody>
           <a:bodyPr wrap="square" lIns="0" tIns="0" rIns="0" bIns="0" rtlCol="0" anchor="ctr"/>
           <a:lstStyle/>
+          <a:p>
+            <a:pPr indent="0" marL="0">
+              <a:buNone/>
+            </a:pPr>
+            <a:r>
+              <a:rPr lang="en-US" sz="950" dirty="0">
+                <a:solidFill>
+                  <a:srgbClr val="7F7F7F"/>
+                </a:solidFill>
+              </a:rPr>
+              <a:t>家數檢核：183家 ＝ 115年超額 99家 ＋ 115年未達成 84家；右表66家為「114年未達標群113家」中115年再次未達成者，其餘47家已超額。</a:t>
+            </a:r>
+            <a:endParaRPr lang="en-US" sz="950" dirty="0"/>
+          </a:p>
           <a:p>
             <a:pPr indent="0" marL="0">
               <a:buNone/>
@@ -11862,10 +11904,10 @@
             <a:tbl>
               <a:tblPr/>
               <a:tblGrid>
-                <a:gridCol w="1828800"/>
-                <a:gridCol w="685800"/>
+                <a:gridCol w="1645920"/>
+                <a:gridCol w="914400"/>
                 <a:gridCol w="1097280"/>
-                <a:gridCol w="914400"/>
+                <a:gridCol w="868680"/>
               </a:tblGrid>
               <a:tr h="301752">
                 <a:tc>
@@ -11877,14 +11919,14 @@
                         <a:buNone/>
                       </a:pPr>
                       <a:r>
-                        <a:rPr lang="en-US" sz="1400" b="1" dirty="0">
+                        <a:rPr lang="en-US" sz="1200" b="1" dirty="0">
                           <a:solidFill>
                             <a:srgbClr val="FFFFFF"/>
                           </a:solidFill>
                         </a:rPr>
                         <a:t>114年分群</a:t>
                       </a:r>
-                      <a:endParaRPr lang="en-US" sz="1400" dirty="0"/>
+                      <a:endParaRPr lang="en-US" sz="1200" dirty="0"/>
                     </a:p>
                   </a:txBody>
                   <a:tcPr marL="36576" marR="36576" marT="36576" marB="36576" anchor="ctr">
@@ -11938,14 +11980,14 @@
                         <a:buNone/>
                       </a:pPr>
                       <a:r>
-                        <a:rPr lang="en-US" sz="1400" b="1" dirty="0">
+                        <a:rPr lang="en-US" sz="1050" b="1" dirty="0">
                           <a:solidFill>
                             <a:srgbClr val="FFFFFF"/>
                           </a:solidFill>
                         </a:rPr>
-                        <a:t>家數</a:t>
+                        <a:t>115年未達成家數</a:t>
                       </a:r>
-                      <a:endParaRPr lang="en-US" sz="1400" dirty="0"/>
+                      <a:endParaRPr lang="en-US" sz="1050" dirty="0"/>
                     </a:p>
                   </a:txBody>
                   <a:tcPr marL="36576" marR="36576" marT="36576" marB="36576" anchor="ctr">
@@ -13601,8 +13643,8 @@
         </p:nvSpPr>
         <p:spPr>
           <a:xfrm>
-            <a:off x="7086600" y="4343400"/>
-            <a:ext cx="4526280" cy="1691640"/>
+            <a:off x="7086600" y="4709160"/>
+            <a:ext cx="4526280" cy="1325880"/>
           </a:xfrm>
           <a:prstGeom prst="rect">
             <a:avLst/>
@@ -13621,14 +13663,14 @@
               <a:buNone/>
             </a:pPr>
             <a:r>
-              <a:rPr lang="en-US" sz="1100" dirty="0">
+              <a:rPr lang="en-US" sz="1050" dirty="0">
                 <a:solidFill>
                   <a:srgbClr val="000000"/>
                 </a:solidFill>
               </a:rPr>
-              <a:t>114年未達標群被加成的目標，實際上有 7.1億 沒有達成，占全行缺口 86%。</a:t>
+              <a:t>114年未達標群113家中，115年有66家再次未達成、缺口 7.1億，占全行缺口 86%；其餘47家超額 6.2億。</a:t>
             </a:r>
-            <a:endParaRPr lang="en-US" sz="1100" dirty="0"/>
+            <a:endParaRPr lang="en-US" sz="1050" dirty="0"/>
           </a:p>
           <a:p>
             <a:pPr indent="0" marL="0">
@@ -13638,14 +13680,14 @@
               <a:buNone/>
             </a:pPr>
             <a:r>
-              <a:rPr lang="en-US" sz="1100" dirty="0">
+              <a:rPr lang="en-US" sz="1050" dirty="0">
                 <a:solidFill>
                   <a:srgbClr val="000000"/>
                 </a:solidFill>
               </a:rPr>
               <a:t>這些缺口由 99 家超額分行（多為績優分行）的 15.2億 填補，全行仍達成 105.9%，使結構問題在總數中被掩蓋。</a:t>
             </a:r>
-            <a:endParaRPr lang="en-US" sz="1100" dirty="0"/>
+            <a:endParaRPr lang="en-US" sz="1050" dirty="0"/>
           </a:p>
           <a:p>
             <a:pPr indent="0" marL="0">
@@ -13655,14 +13697,14 @@
               <a:buNone/>
             </a:pPr>
             <a:r>
-              <a:rPr lang="en-US" sz="1100" b="1" dirty="0">
+              <a:rPr lang="en-US" sz="1050" b="1" dirty="0">
                 <a:solidFill>
                   <a:srgbClr val="C00000"/>
                 </a:solidFill>
               </a:rPr>
               <a:t>目標加成並未換來實績，只是把缺口轉嫁到其他分行。</a:t>
             </a:r>
-            <a:endParaRPr lang="en-US" sz="1100" dirty="0"/>
+            <a:endParaRPr lang="en-US" sz="1050" dirty="0"/>
           </a:p>
         </p:txBody>
       </p:sp>

--- a/output/114→115分行表現分析_5頁.pptx
+++ b/output/114→115分行表現分析_5頁.pptx
@@ -111,7 +111,7 @@
   <p:extLst>
     <p:ext uri="{521415D9-36F7-43E2-AB2F-B90AF26B5E84}">
       <p14:sectionLst xmlns:p14="http://schemas.microsoft.com/office/powerpoint/2010/main">
-        <p14:section name="114→115 分行表現分析" id="{dbcc2ebd-e4a2-fb6e-913f-d50febd14acb}">
+        <p14:section name="114→115 分行表現分析" id="{4ba8ad87-1a73-3f50-1c83-c49b43523bf0}">
           <p14:sldIdLst>
             <p14:sldId id="256"/>
             <p14:sldId id="257"/>
@@ -2038,7 +2038,7 @@
           <a:p>
             <a:r>
               <a:rPr lang="en-US" dirty="0"/>
-              <a:t>瀑布：目標117.85億＋超額15.23億−缺口8.23億＝實績124.86億。缺口86%來自114年未達標群。</a:t>
+              <a:t>瀑布：目標117.85億＋超額15.23億−缺口8.23億＝實績124.86億。超額60%來自114年達標群；缺口86%來自114年未達標群。</a:t>
             </a:r>
             <a:endParaRPr lang="en-US" dirty="0"/>
           </a:p>
@@ -11225,7 +11225,7 @@
         </p:nvSpPr>
         <p:spPr>
           <a:xfrm>
-            <a:off x="822960" y="5120640"/>
+            <a:off x="822960" y="4892040"/>
             <a:ext cx="5989320" cy="0"/>
           </a:xfrm>
           <a:prstGeom prst="line">
@@ -11248,8 +11248,8 @@
         </p:nvSpPr>
         <p:spPr>
           <a:xfrm>
-            <a:off x="822960" y="3488436"/>
-            <a:ext cx="1188720" cy="1632204"/>
+            <a:off x="822960" y="3353105"/>
+            <a:ext cx="1188720" cy="1538935"/>
           </a:xfrm>
           <a:prstGeom prst="rect">
             <a:avLst/>
@@ -11273,7 +11273,7 @@
         </p:nvSpPr>
         <p:spPr>
           <a:xfrm>
-            <a:off x="640080" y="3168396"/>
+            <a:off x="640080" y="3033065"/>
             <a:ext cx="1554480" cy="274320"/>
           </a:xfrm>
           <a:prstGeom prst="rect">
@@ -11309,7 +11309,7 @@
         </p:nvSpPr>
         <p:spPr>
           <a:xfrm>
-            <a:off x="640080" y="5166360"/>
+            <a:off x="640080" y="4937760"/>
             <a:ext cx="1554480" cy="548640"/>
           </a:xfrm>
           <a:prstGeom prst="rect">
@@ -11345,8 +11345,8 @@
         </p:nvSpPr>
         <p:spPr>
           <a:xfrm>
-            <a:off x="2423160" y="2095805"/>
-            <a:ext cx="1188720" cy="1392631"/>
+            <a:off x="2423160" y="2040053"/>
+            <a:ext cx="1188720" cy="1313052"/>
           </a:xfrm>
           <a:prstGeom prst="rect">
             <a:avLst/>
@@ -11370,7 +11370,7 @@
         </p:nvSpPr>
         <p:spPr>
           <a:xfrm>
-            <a:off x="2240280" y="1775765"/>
+            <a:off x="2240280" y="1720013"/>
             <a:ext cx="1554480" cy="274320"/>
           </a:xfrm>
           <a:prstGeom prst="rect">
@@ -11406,7 +11406,7 @@
         </p:nvSpPr>
         <p:spPr>
           <a:xfrm>
-            <a:off x="2240280" y="5166360"/>
+            <a:off x="2240280" y="4937760"/>
             <a:ext cx="1554480" cy="548640"/>
           </a:xfrm>
           <a:prstGeom prst="rect">
@@ -11456,7 +11456,7 @@
         </p:nvSpPr>
         <p:spPr>
           <a:xfrm>
-            <a:off x="2011680" y="3488436"/>
+            <a:off x="2011680" y="3353105"/>
             <a:ext cx="411480" cy="0"/>
           </a:xfrm>
           <a:prstGeom prst="line">
@@ -11479,8 +11479,8 @@
         </p:nvSpPr>
         <p:spPr>
           <a:xfrm>
-            <a:off x="4023360" y="2095805"/>
-            <a:ext cx="1188720" cy="751637"/>
+            <a:off x="4023360" y="2040053"/>
+            <a:ext cx="1188720" cy="708686"/>
           </a:xfrm>
           <a:prstGeom prst="rect">
             <a:avLst/>
@@ -11504,7 +11504,7 @@
         </p:nvSpPr>
         <p:spPr>
           <a:xfrm>
-            <a:off x="3840480" y="1775765"/>
+            <a:off x="3840480" y="1720013"/>
             <a:ext cx="1554480" cy="274320"/>
           </a:xfrm>
           <a:prstGeom prst="rect">
@@ -11540,7 +11540,7 @@
         </p:nvSpPr>
         <p:spPr>
           <a:xfrm>
-            <a:off x="3840480" y="5166360"/>
+            <a:off x="3840480" y="4937760"/>
             <a:ext cx="1554480" cy="548640"/>
           </a:xfrm>
           <a:prstGeom prst="rect">
@@ -11590,7 +11590,7 @@
         </p:nvSpPr>
         <p:spPr>
           <a:xfrm>
-            <a:off x="3611880" y="2095805"/>
+            <a:off x="3611880" y="2040053"/>
             <a:ext cx="411480" cy="0"/>
           </a:xfrm>
           <a:prstGeom prst="line">
@@ -11613,8 +11613,8 @@
         </p:nvSpPr>
         <p:spPr>
           <a:xfrm>
-            <a:off x="5623560" y="2847442"/>
-            <a:ext cx="1188720" cy="2273198"/>
+            <a:off x="5623560" y="2748739"/>
+            <a:ext cx="1188720" cy="2143301"/>
           </a:xfrm>
           <a:prstGeom prst="rect">
             <a:avLst/>
@@ -11638,7 +11638,7 @@
         </p:nvSpPr>
         <p:spPr>
           <a:xfrm>
-            <a:off x="5440680" y="2527402"/>
+            <a:off x="5440680" y="2428699"/>
             <a:ext cx="1554480" cy="274320"/>
           </a:xfrm>
           <a:prstGeom prst="rect">
@@ -11674,7 +11674,7 @@
         </p:nvSpPr>
         <p:spPr>
           <a:xfrm>
-            <a:off x="5440680" y="5166360"/>
+            <a:off x="5440680" y="4937760"/>
             <a:ext cx="1554480" cy="548640"/>
           </a:xfrm>
           <a:prstGeom prst="rect">
@@ -11710,58 +11710,8 @@
         </p:nvSpPr>
         <p:spPr>
           <a:xfrm>
-            <a:off x="548640" y="5760720"/>
-            <a:ext cx="6309360" cy="502920"/>
-          </a:xfrm>
-          <a:prstGeom prst="rect">
-            <a:avLst/>
-          </a:prstGeom>
-          <a:noFill/>
-          <a:ln/>
-        </p:spPr>
-        <p:txBody>
-          <a:bodyPr wrap="square" lIns="0" tIns="0" rIns="0" bIns="0" rtlCol="0" anchor="ctr"/>
-          <a:lstStyle/>
-          <a:p>
-            <a:pPr indent="0" marL="0">
-              <a:buNone/>
-            </a:pPr>
-            <a:r>
-              <a:rPr lang="en-US" sz="950" dirty="0">
-                <a:solidFill>
-                  <a:srgbClr val="7F7F7F"/>
-                </a:solidFill>
-              </a:rPr>
-              <a:t>家數檢核：183家 ＝ 115年超額 99家 ＋ 115年未達成 84家；右表66家為「114年未達標群113家」中115年再次未達成者，其餘47家已超額。</a:t>
-            </a:r>
-            <a:endParaRPr lang="en-US" sz="950" dirty="0"/>
-          </a:p>
-          <a:p>
-            <a:pPr indent="0" marL="0">
-              <a:buNone/>
-            </a:pPr>
-            <a:r>
-              <a:rPr lang="en-US" sz="950" dirty="0">
-                <a:solidFill>
-                  <a:srgbClr val="7F7F7F"/>
-                </a:solidFill>
-              </a:rPr>
-              <a:t>單位：億元；縱軸自100億起</a:t>
-            </a:r>
-            <a:endParaRPr lang="en-US" sz="950" dirty="0"/>
-          </a:p>
-        </p:txBody>
-      </p:sp>
-      <p:sp>
-        <p:nvSpPr>
-          <p:cNvPr id="20" name="Text 18"/>
-          <p:cNvSpPr txBox="1"/>
-          <p:nvPr/>
-        </p:nvSpPr>
-        <p:spPr>
-          <a:xfrm>
-            <a:off x="548640" y="1554480"/>
-            <a:ext cx="2103120" cy="822960"/>
+            <a:off x="548640" y="5532120"/>
+            <a:ext cx="6309360" cy="685800"/>
           </a:xfrm>
           <a:prstGeom prst="rect">
             <a:avLst/>
@@ -11774,20 +11724,26 @@
           <a:lstStyle/>
           <a:p>
             <a:pPr indent="0" marL="0">
+              <a:spcAft>
+                <a:spcPts val="200"/>
+              </a:spcAft>
               <a:buNone/>
             </a:pPr>
             <a:r>
-              <a:rPr lang="en-US" sz="1050" b="1" dirty="0">
+              <a:rPr lang="en-US" sz="950" dirty="0">
                 <a:solidFill>
-                  <a:srgbClr val="2EA9B6"/>
+                  <a:srgbClr val="7F7F7F"/>
                 </a:solidFill>
               </a:rPr>
-              <a:t>超額 15.23億 組成</a:t>
+              <a:t>家數檢核：183家 ＝ 115年超額 99家 ＋ 115年未達成 84家；單位：億元，縱軸自100億起。</a:t>
             </a:r>
             <a:endParaRPr lang="en-US" sz="1050" dirty="0"/>
           </a:p>
           <a:p>
             <a:pPr indent="0" marL="0">
+              <a:spcAft>
+                <a:spcPts val="200"/>
+              </a:spcAft>
               <a:buNone/>
             </a:pPr>
             <a:r>
@@ -11796,21 +11752,24 @@
                   <a:srgbClr val="000000"/>
                 </a:solidFill>
               </a:rPr>
-              <a:t>114達標群 52家：+9.08億</a:t>
+              <a:t>114年未達標群113家中，66家再次未達成、缺口 7.1億（占全行缺口86%）；其餘47家超額 6.2億。這些缺口由 99 家超額分行的 15.2億 填補，全行仍達成 105.9%。</a:t>
             </a:r>
             <a:endParaRPr lang="en-US" sz="1050" dirty="0"/>
           </a:p>
           <a:p>
             <a:pPr indent="0" marL="0">
+              <a:spcAft>
+                <a:spcPts val="200"/>
+              </a:spcAft>
               <a:buNone/>
             </a:pPr>
             <a:r>
-              <a:rPr lang="en-US" sz="1050" dirty="0">
+              <a:rPr lang="en-US" sz="1050" b="1" dirty="0">
                 <a:solidFill>
-                  <a:srgbClr val="000000"/>
+                  <a:srgbClr val="C00000"/>
                 </a:solidFill>
               </a:rPr>
-              <a:t>114未達標群 47家：+6.16億</a:t>
+              <a:t>目標加成並未換來實績，只是把缺口轉嫁到其他分行。</a:t>
             </a:r>
             <a:endParaRPr lang="en-US" sz="1050" dirty="0"/>
           </a:p>
@@ -11818,14 +11777,14 @@
       </p:sp>
       <p:sp>
         <p:nvSpPr>
-          <p:cNvPr id="21" name="gap panel"/>
+          <p:cNvPr id="20" name="breakdown panel"/>
           <p:cNvSpPr/>
           <p:nvPr/>
         </p:nvSpPr>
         <p:spPr>
           <a:xfrm>
             <a:off x="6949440" y="1417320"/>
-            <a:ext cx="4800600" cy="4663440"/>
+            <a:ext cx="4800600" cy="4800600"/>
           </a:xfrm>
           <a:prstGeom prst="rect">
             <a:avLst/>
@@ -11843,22 +11802,22 @@
       </p:sp>
       <p:sp>
         <p:nvSpPr>
-          <p:cNvPr id="22" name="chip 缺口 8.23億 來自誰"/>
+          <p:cNvPr id="21" name="chip surplus"/>
           <p:cNvSpPr txBox="1"/>
           <p:nvPr/>
         </p:nvSpPr>
         <p:spPr>
           <a:xfrm>
-            <a:off x="7086600" y="1554480"/>
-            <a:ext cx="2194560" cy="365760"/>
+            <a:off x="7086600" y="1490472"/>
+            <a:ext cx="2377440" cy="292608"/>
           </a:xfrm>
           <a:prstGeom prst="roundRect">
             <a:avLst>
-              <a:gd name="adj" fmla="val 20000"/>
+              <a:gd name="adj" fmla="val 25000"/>
             </a:avLst>
           </a:prstGeom>
           <a:solidFill>
-            <a:srgbClr val="960A14"/>
+            <a:srgbClr val="2EA9B6"/>
           </a:solidFill>
           <a:ln/>
         </p:spPr>
@@ -11870,14 +11829,14 @@
               <a:buNone/>
             </a:pPr>
             <a:r>
-              <a:rPr lang="en-US" sz="1600" b="1" dirty="0">
+              <a:rPr lang="en-US" sz="1200" b="1" dirty="0">
                 <a:solidFill>
                   <a:srgbClr val="FFFFFF"/>
                 </a:solidFill>
               </a:rPr>
-              <a:t>缺口 8.23億 來自誰</a:t>
+              <a:t>超額 15.23億 來自誰</a:t>
             </a:r>
-            <a:endParaRPr lang="en-US" sz="1600" dirty="0"/>
+            <a:endParaRPr lang="en-US" sz="1200" dirty="0"/>
           </a:p>
         </p:txBody>
       </p:sp>
@@ -11896,7 +11855,7 @@
           </p:nvPr>
         </p:nvGraphicFramePr>
         <p:xfrm>
-          <a:off x="7086600" y="2057400"/>
+          <a:off x="7086600" y="1828800"/>
           <a:ext cx="4526280" cy="914400"/>
         </p:xfrm>
         <a:graphic>
@@ -11904,12 +11863,12 @@
             <a:tbl>
               <a:tblPr/>
               <a:tblGrid>
-                <a:gridCol w="1645920"/>
+                <a:gridCol w="1737360"/>
                 <a:gridCol w="914400"/>
-                <a:gridCol w="1097280"/>
+                <a:gridCol w="1005840"/>
                 <a:gridCol w="868680"/>
               </a:tblGrid>
-              <a:tr h="301752">
+              <a:tr h="228600">
                 <a:tc>
                   <a:txBody>
                     <a:bodyPr/>
@@ -11919,55 +11878,55 @@
                         <a:buNone/>
                       </a:pPr>
                       <a:r>
-                        <a:rPr lang="en-US" sz="1200" b="1" dirty="0">
+                        <a:rPr lang="en-US" sz="1100" b="1" dirty="0">
                           <a:solidFill>
                             <a:srgbClr val="FFFFFF"/>
                           </a:solidFill>
                         </a:rPr>
                         <a:t>114年分群</a:t>
                       </a:r>
-                      <a:endParaRPr lang="en-US" sz="1200" dirty="0"/>
-                    </a:p>
-                  </a:txBody>
-                  <a:tcPr marL="36576" marR="36576" marT="36576" marB="36576" anchor="ctr">
-                    <a:lnL w="9525" cap="flat" cmpd="sng" algn="ctr">
-                      <a:solidFill>
-                        <a:srgbClr val="FFFFFF"/>
-                      </a:solidFill>
-                      <a:prstDash val="solid"/>
-                      <a:round/>
-                      <a:headEnd type="none" w="med" len="med"/>
-                      <a:tailEnd type="none" w="med" len="med"/>
-                    </a:lnL>
-                    <a:lnR w="9525" cap="flat" cmpd="sng" algn="ctr">
-                      <a:solidFill>
-                        <a:srgbClr val="FFFFFF"/>
-                      </a:solidFill>
-                      <a:prstDash val="solid"/>
-                      <a:round/>
-                      <a:headEnd type="none" w="med" len="med"/>
-                      <a:tailEnd type="none" w="med" len="med"/>
-                    </a:lnR>
-                    <a:lnT w="9525" cap="flat" cmpd="sng" algn="ctr">
-                      <a:solidFill>
-                        <a:srgbClr val="FFFFFF"/>
-                      </a:solidFill>
-                      <a:prstDash val="solid"/>
-                      <a:round/>
-                      <a:headEnd type="none" w="med" len="med"/>
-                      <a:tailEnd type="none" w="med" len="med"/>
-                    </a:lnT>
-                    <a:lnB w="9525" cap="flat" cmpd="sng" algn="ctr">
-                      <a:solidFill>
-                        <a:srgbClr val="FFFFFF"/>
-                      </a:solidFill>
-                      <a:prstDash val="solid"/>
-                      <a:round/>
-                      <a:headEnd type="none" w="med" len="med"/>
-                      <a:tailEnd type="none" w="med" len="med"/>
-                    </a:lnB>
-                    <a:solidFill>
-                      <a:srgbClr val="960A14"/>
+                      <a:endParaRPr lang="en-US" sz="1100" dirty="0"/>
+                    </a:p>
+                  </a:txBody>
+                  <a:tcPr marL="36576" marR="36576" marT="36576" marB="36576" anchor="ctr">
+                    <a:lnL w="9525" cap="flat" cmpd="sng" algn="ctr">
+                      <a:solidFill>
+                        <a:srgbClr val="FFFFFF"/>
+                      </a:solidFill>
+                      <a:prstDash val="solid"/>
+                      <a:round/>
+                      <a:headEnd type="none" w="med" len="med"/>
+                      <a:tailEnd type="none" w="med" len="med"/>
+                    </a:lnL>
+                    <a:lnR w="9525" cap="flat" cmpd="sng" algn="ctr">
+                      <a:solidFill>
+                        <a:srgbClr val="FFFFFF"/>
+                      </a:solidFill>
+                      <a:prstDash val="solid"/>
+                      <a:round/>
+                      <a:headEnd type="none" w="med" len="med"/>
+                      <a:tailEnd type="none" w="med" len="med"/>
+                    </a:lnR>
+                    <a:lnT w="9525" cap="flat" cmpd="sng" algn="ctr">
+                      <a:solidFill>
+                        <a:srgbClr val="FFFFFF"/>
+                      </a:solidFill>
+                      <a:prstDash val="solid"/>
+                      <a:round/>
+                      <a:headEnd type="none" w="med" len="med"/>
+                      <a:tailEnd type="none" w="med" len="med"/>
+                    </a:lnT>
+                    <a:lnB w="9525" cap="flat" cmpd="sng" algn="ctr">
+                      <a:solidFill>
+                        <a:srgbClr val="FFFFFF"/>
+                      </a:solidFill>
+                      <a:prstDash val="solid"/>
+                      <a:round/>
+                      <a:headEnd type="none" w="med" len="med"/>
+                      <a:tailEnd type="none" w="med" len="med"/>
+                    </a:lnB>
+                    <a:solidFill>
+                      <a:srgbClr val="2EA9B6"/>
                     </a:solidFill>
                   </a:tcPr>
                 </a:tc>
@@ -11980,116 +11939,69 @@
                         <a:buNone/>
                       </a:pPr>
                       <a:r>
-                        <a:rPr lang="en-US" sz="1050" b="1" dirty="0">
+                        <a:rPr lang="en-US" sz="950" b="1" dirty="0">
                           <a:solidFill>
                             <a:srgbClr val="FFFFFF"/>
                           </a:solidFill>
                         </a:rPr>
-                        <a:t>115年未達成家數</a:t>
+                        <a:t>115年</a:t>
                       </a:r>
-                      <a:endParaRPr lang="en-US" sz="1050" dirty="0"/>
-                    </a:p>
-                  </a:txBody>
-                  <a:tcPr marL="36576" marR="36576" marT="36576" marB="36576" anchor="ctr">
-                    <a:lnL w="9525" cap="flat" cmpd="sng" algn="ctr">
-                      <a:solidFill>
-                        <a:srgbClr val="FFFFFF"/>
-                      </a:solidFill>
-                      <a:prstDash val="solid"/>
-                      <a:round/>
-                      <a:headEnd type="none" w="med" len="med"/>
-                      <a:tailEnd type="none" w="med" len="med"/>
-                    </a:lnL>
-                    <a:lnR w="9525" cap="flat" cmpd="sng" algn="ctr">
-                      <a:solidFill>
-                        <a:srgbClr val="FFFFFF"/>
-                      </a:solidFill>
-                      <a:prstDash val="solid"/>
-                      <a:round/>
-                      <a:headEnd type="none" w="med" len="med"/>
-                      <a:tailEnd type="none" w="med" len="med"/>
-                    </a:lnR>
-                    <a:lnT w="9525" cap="flat" cmpd="sng" algn="ctr">
-                      <a:solidFill>
-                        <a:srgbClr val="FFFFFF"/>
-                      </a:solidFill>
-                      <a:prstDash val="solid"/>
-                      <a:round/>
-                      <a:headEnd type="none" w="med" len="med"/>
-                      <a:tailEnd type="none" w="med" len="med"/>
-                    </a:lnT>
-                    <a:lnB w="9525" cap="flat" cmpd="sng" algn="ctr">
-                      <a:solidFill>
-                        <a:srgbClr val="FFFFFF"/>
-                      </a:solidFill>
-                      <a:prstDash val="solid"/>
-                      <a:round/>
-                      <a:headEnd type="none" w="med" len="med"/>
-                      <a:tailEnd type="none" w="med" len="med"/>
-                    </a:lnB>
-                    <a:solidFill>
-                      <a:srgbClr val="960A14"/>
-                    </a:solidFill>
-                  </a:tcPr>
-                </a:tc>
-                <a:tc>
-                  <a:txBody>
-                    <a:bodyPr/>
-                    <a:lstStyle/>
+                      <a:endParaRPr lang="en-US" sz="950" dirty="0"/>
+                    </a:p>
                     <a:p>
                       <a:pPr algn="ctr" indent="0" marL="0">
                         <a:buNone/>
                       </a:pPr>
                       <a:r>
-                        <a:rPr lang="en-US" sz="1400" b="1" dirty="0">
+                        <a:rPr lang="en-US" sz="950" b="1" dirty="0">
                           <a:solidFill>
                             <a:srgbClr val="FFFFFF"/>
                           </a:solidFill>
                         </a:rPr>
-                        <a:t>未達成缺口</a:t>
+                        <a:t>超額家數</a:t>
                       </a:r>
-                      <a:endParaRPr lang="en-US" sz="1400" dirty="0"/>
-                    </a:p>
-                  </a:txBody>
-                  <a:tcPr marL="36576" marR="36576" marT="36576" marB="36576" anchor="ctr">
-                    <a:lnL w="9525" cap="flat" cmpd="sng" algn="ctr">
-                      <a:solidFill>
-                        <a:srgbClr val="FFFFFF"/>
-                      </a:solidFill>
-                      <a:prstDash val="solid"/>
-                      <a:round/>
-                      <a:headEnd type="none" w="med" len="med"/>
-                      <a:tailEnd type="none" w="med" len="med"/>
-                    </a:lnL>
-                    <a:lnR w="9525" cap="flat" cmpd="sng" algn="ctr">
-                      <a:solidFill>
-                        <a:srgbClr val="FFFFFF"/>
-                      </a:solidFill>
-                      <a:prstDash val="solid"/>
-                      <a:round/>
-                      <a:headEnd type="none" w="med" len="med"/>
-                      <a:tailEnd type="none" w="med" len="med"/>
-                    </a:lnR>
-                    <a:lnT w="9525" cap="flat" cmpd="sng" algn="ctr">
-                      <a:solidFill>
-                        <a:srgbClr val="FFFFFF"/>
-                      </a:solidFill>
-                      <a:prstDash val="solid"/>
-                      <a:round/>
-                      <a:headEnd type="none" w="med" len="med"/>
-                      <a:tailEnd type="none" w="med" len="med"/>
-                    </a:lnT>
-                    <a:lnB w="9525" cap="flat" cmpd="sng" algn="ctr">
-                      <a:solidFill>
-                        <a:srgbClr val="FFFFFF"/>
-                      </a:solidFill>
-                      <a:prstDash val="solid"/>
-                      <a:round/>
-                      <a:headEnd type="none" w="med" len="med"/>
-                      <a:tailEnd type="none" w="med" len="med"/>
-                    </a:lnB>
-                    <a:solidFill>
-                      <a:srgbClr val="960A14"/>
+                      <a:endParaRPr lang="en-US" sz="950" dirty="0"/>
+                    </a:p>
+                  </a:txBody>
+                  <a:tcPr marL="36576" marR="36576" marT="36576" marB="36576" anchor="ctr">
+                    <a:lnL w="9525" cap="flat" cmpd="sng" algn="ctr">
+                      <a:solidFill>
+                        <a:srgbClr val="FFFFFF"/>
+                      </a:solidFill>
+                      <a:prstDash val="solid"/>
+                      <a:round/>
+                      <a:headEnd type="none" w="med" len="med"/>
+                      <a:tailEnd type="none" w="med" len="med"/>
+                    </a:lnL>
+                    <a:lnR w="9525" cap="flat" cmpd="sng" algn="ctr">
+                      <a:solidFill>
+                        <a:srgbClr val="FFFFFF"/>
+                      </a:solidFill>
+                      <a:prstDash val="solid"/>
+                      <a:round/>
+                      <a:headEnd type="none" w="med" len="med"/>
+                      <a:tailEnd type="none" w="med" len="med"/>
+                    </a:lnR>
+                    <a:lnT w="9525" cap="flat" cmpd="sng" algn="ctr">
+                      <a:solidFill>
+                        <a:srgbClr val="FFFFFF"/>
+                      </a:solidFill>
+                      <a:prstDash val="solid"/>
+                      <a:round/>
+                      <a:headEnd type="none" w="med" len="med"/>
+                      <a:tailEnd type="none" w="med" len="med"/>
+                    </a:lnT>
+                    <a:lnB w="9525" cap="flat" cmpd="sng" algn="ctr">
+                      <a:solidFill>
+                        <a:srgbClr val="FFFFFF"/>
+                      </a:solidFill>
+                      <a:prstDash val="solid"/>
+                      <a:round/>
+                      <a:headEnd type="none" w="med" len="med"/>
+                      <a:tailEnd type="none" w="med" len="med"/>
+                    </a:lnB>
+                    <a:solidFill>
+                      <a:srgbClr val="2EA9B6"/>
                     </a:solidFill>
                   </a:tcPr>
                 </a:tc>
@@ -12102,60 +12014,121 @@
                         <a:buNone/>
                       </a:pPr>
                       <a:r>
-                        <a:rPr lang="en-US" sz="1400" b="1" dirty="0">
+                        <a:rPr lang="en-US" sz="1100" b="1" dirty="0">
+                          <a:solidFill>
+                            <a:srgbClr val="FFFFFF"/>
+                          </a:solidFill>
+                        </a:rPr>
+                        <a:t>超額金額</a:t>
+                      </a:r>
+                      <a:endParaRPr lang="en-US" sz="1100" dirty="0"/>
+                    </a:p>
+                  </a:txBody>
+                  <a:tcPr marL="36576" marR="36576" marT="36576" marB="36576" anchor="ctr">
+                    <a:lnL w="9525" cap="flat" cmpd="sng" algn="ctr">
+                      <a:solidFill>
+                        <a:srgbClr val="FFFFFF"/>
+                      </a:solidFill>
+                      <a:prstDash val="solid"/>
+                      <a:round/>
+                      <a:headEnd type="none" w="med" len="med"/>
+                      <a:tailEnd type="none" w="med" len="med"/>
+                    </a:lnL>
+                    <a:lnR w="9525" cap="flat" cmpd="sng" algn="ctr">
+                      <a:solidFill>
+                        <a:srgbClr val="FFFFFF"/>
+                      </a:solidFill>
+                      <a:prstDash val="solid"/>
+                      <a:round/>
+                      <a:headEnd type="none" w="med" len="med"/>
+                      <a:tailEnd type="none" w="med" len="med"/>
+                    </a:lnR>
+                    <a:lnT w="9525" cap="flat" cmpd="sng" algn="ctr">
+                      <a:solidFill>
+                        <a:srgbClr val="FFFFFF"/>
+                      </a:solidFill>
+                      <a:prstDash val="solid"/>
+                      <a:round/>
+                      <a:headEnd type="none" w="med" len="med"/>
+                      <a:tailEnd type="none" w="med" len="med"/>
+                    </a:lnT>
+                    <a:lnB w="9525" cap="flat" cmpd="sng" algn="ctr">
+                      <a:solidFill>
+                        <a:srgbClr val="FFFFFF"/>
+                      </a:solidFill>
+                      <a:prstDash val="solid"/>
+                      <a:round/>
+                      <a:headEnd type="none" w="med" len="med"/>
+                      <a:tailEnd type="none" w="med" len="med"/>
+                    </a:lnB>
+                    <a:solidFill>
+                      <a:srgbClr val="2EA9B6"/>
+                    </a:solidFill>
+                  </a:tcPr>
+                </a:tc>
+                <a:tc>
+                  <a:txBody>
+                    <a:bodyPr/>
+                    <a:lstStyle/>
+                    <a:p>
+                      <a:pPr algn="ctr" indent="0" marL="0">
+                        <a:buNone/>
+                      </a:pPr>
+                      <a:r>
+                        <a:rPr lang="en-US" sz="1100" b="1" dirty="0">
                           <a:solidFill>
                             <a:srgbClr val="FFFFFF"/>
                           </a:solidFill>
                         </a:rPr>
                         <a:t>占比</a:t>
                       </a:r>
-                      <a:endParaRPr lang="en-US" sz="1400" dirty="0"/>
-                    </a:p>
-                  </a:txBody>
-                  <a:tcPr marL="36576" marR="36576" marT="36576" marB="36576" anchor="ctr">
-                    <a:lnL w="9525" cap="flat" cmpd="sng" algn="ctr">
-                      <a:solidFill>
-                        <a:srgbClr val="FFFFFF"/>
-                      </a:solidFill>
-                      <a:prstDash val="solid"/>
-                      <a:round/>
-                      <a:headEnd type="none" w="med" len="med"/>
-                      <a:tailEnd type="none" w="med" len="med"/>
-                    </a:lnL>
-                    <a:lnR w="9525" cap="flat" cmpd="sng" algn="ctr">
-                      <a:solidFill>
-                        <a:srgbClr val="FFFFFF"/>
-                      </a:solidFill>
-                      <a:prstDash val="solid"/>
-                      <a:round/>
-                      <a:headEnd type="none" w="med" len="med"/>
-                      <a:tailEnd type="none" w="med" len="med"/>
-                    </a:lnR>
-                    <a:lnT w="9525" cap="flat" cmpd="sng" algn="ctr">
-                      <a:solidFill>
-                        <a:srgbClr val="FFFFFF"/>
-                      </a:solidFill>
-                      <a:prstDash val="solid"/>
-                      <a:round/>
-                      <a:headEnd type="none" w="med" len="med"/>
-                      <a:tailEnd type="none" w="med" len="med"/>
-                    </a:lnT>
-                    <a:lnB w="9525" cap="flat" cmpd="sng" algn="ctr">
-                      <a:solidFill>
-                        <a:srgbClr val="FFFFFF"/>
-                      </a:solidFill>
-                      <a:prstDash val="solid"/>
-                      <a:round/>
-                      <a:headEnd type="none" w="med" len="med"/>
-                      <a:tailEnd type="none" w="med" len="med"/>
-                    </a:lnB>
-                    <a:solidFill>
-                      <a:srgbClr val="960A14"/>
+                      <a:endParaRPr lang="en-US" sz="1100" dirty="0"/>
+                    </a:p>
+                  </a:txBody>
+                  <a:tcPr marL="36576" marR="36576" marT="36576" marB="36576" anchor="ctr">
+                    <a:lnL w="9525" cap="flat" cmpd="sng" algn="ctr">
+                      <a:solidFill>
+                        <a:srgbClr val="FFFFFF"/>
+                      </a:solidFill>
+                      <a:prstDash val="solid"/>
+                      <a:round/>
+                      <a:headEnd type="none" w="med" len="med"/>
+                      <a:tailEnd type="none" w="med" len="med"/>
+                    </a:lnL>
+                    <a:lnR w="9525" cap="flat" cmpd="sng" algn="ctr">
+                      <a:solidFill>
+                        <a:srgbClr val="FFFFFF"/>
+                      </a:solidFill>
+                      <a:prstDash val="solid"/>
+                      <a:round/>
+                      <a:headEnd type="none" w="med" len="med"/>
+                      <a:tailEnd type="none" w="med" len="med"/>
+                    </a:lnR>
+                    <a:lnT w="9525" cap="flat" cmpd="sng" algn="ctr">
+                      <a:solidFill>
+                        <a:srgbClr val="FFFFFF"/>
+                      </a:solidFill>
+                      <a:prstDash val="solid"/>
+                      <a:round/>
+                      <a:headEnd type="none" w="med" len="med"/>
+                      <a:tailEnd type="none" w="med" len="med"/>
+                    </a:lnT>
+                    <a:lnB w="9525" cap="flat" cmpd="sng" algn="ctr">
+                      <a:solidFill>
+                        <a:srgbClr val="FFFFFF"/>
+                      </a:solidFill>
+                      <a:prstDash val="solid"/>
+                      <a:round/>
+                      <a:headEnd type="none" w="med" len="med"/>
+                      <a:tailEnd type="none" w="med" len="med"/>
+                    </a:lnB>
+                    <a:solidFill>
+                      <a:srgbClr val="2EA9B6"/>
                     </a:solidFill>
                   </a:tcPr>
                 </a:tc>
               </a:tr>
-              <a:tr h="301752">
+              <a:tr h="228600">
                 <a:tc>
                   <a:txBody>
                     <a:bodyPr/>
@@ -12165,55 +12138,793 @@
                         <a:buNone/>
                       </a:pPr>
                       <a:r>
-                        <a:rPr lang="en-US" sz="1200" dirty="0">
+                        <a:rPr lang="en-US" sz="1050" b="1" dirty="0">
+                          <a:solidFill>
+                            <a:srgbClr val="2EA9B6"/>
+                          </a:solidFill>
+                        </a:rPr>
+                        <a:t>達標群（≥100%）</a:t>
+                      </a:r>
+                      <a:endParaRPr lang="en-US" sz="1050" dirty="0"/>
+                    </a:p>
+                  </a:txBody>
+                  <a:tcPr marL="36576" marR="36576" marT="36576" marB="36576" anchor="ctr">
+                    <a:lnL w="9525" cap="flat" cmpd="sng" algn="ctr">
+                      <a:solidFill>
+                        <a:srgbClr val="FFFFFF"/>
+                      </a:solidFill>
+                      <a:prstDash val="solid"/>
+                      <a:round/>
+                      <a:headEnd type="none" w="med" len="med"/>
+                      <a:tailEnd type="none" w="med" len="med"/>
+                    </a:lnL>
+                    <a:lnR w="9525" cap="flat" cmpd="sng" algn="ctr">
+                      <a:solidFill>
+                        <a:srgbClr val="FFFFFF"/>
+                      </a:solidFill>
+                      <a:prstDash val="solid"/>
+                      <a:round/>
+                      <a:headEnd type="none" w="med" len="med"/>
+                      <a:tailEnd type="none" w="med" len="med"/>
+                    </a:lnR>
+                    <a:lnT w="9525" cap="flat" cmpd="sng" algn="ctr">
+                      <a:solidFill>
+                        <a:srgbClr val="FFFFFF"/>
+                      </a:solidFill>
+                      <a:prstDash val="solid"/>
+                      <a:round/>
+                      <a:headEnd type="none" w="med" len="med"/>
+                      <a:tailEnd type="none" w="med" len="med"/>
+                    </a:lnT>
+                    <a:lnB w="9525" cap="flat" cmpd="sng" algn="ctr">
+                      <a:solidFill>
+                        <a:srgbClr val="FFFFFF"/>
+                      </a:solidFill>
+                      <a:prstDash val="solid"/>
+                      <a:round/>
+                      <a:headEnd type="none" w="med" len="med"/>
+                      <a:tailEnd type="none" w="med" len="med"/>
+                    </a:lnB>
+                    <a:solidFill>
+                      <a:srgbClr val="FFFFFF"/>
+                    </a:solidFill>
+                  </a:tcPr>
+                </a:tc>
+                <a:tc>
+                  <a:txBody>
+                    <a:bodyPr/>
+                    <a:lstStyle/>
+                    <a:p>
+                      <a:pPr algn="ctr" indent="0" marL="0">
+                        <a:buNone/>
+                      </a:pPr>
+                      <a:r>
+                        <a:rPr lang="en-US" sz="1050" b="1" dirty="0">
+                          <a:solidFill>
+                            <a:srgbClr val="2EA9B6"/>
+                          </a:solidFill>
+                        </a:rPr>
+                        <a:t>52家</a:t>
+                      </a:r>
+                      <a:endParaRPr lang="en-US" sz="1050" dirty="0"/>
+                    </a:p>
+                  </a:txBody>
+                  <a:tcPr marL="36576" marR="36576" marT="36576" marB="36576" anchor="ctr">
+                    <a:lnL w="9525" cap="flat" cmpd="sng" algn="ctr">
+                      <a:solidFill>
+                        <a:srgbClr val="FFFFFF"/>
+                      </a:solidFill>
+                      <a:prstDash val="solid"/>
+                      <a:round/>
+                      <a:headEnd type="none" w="med" len="med"/>
+                      <a:tailEnd type="none" w="med" len="med"/>
+                    </a:lnL>
+                    <a:lnR w="9525" cap="flat" cmpd="sng" algn="ctr">
+                      <a:solidFill>
+                        <a:srgbClr val="FFFFFF"/>
+                      </a:solidFill>
+                      <a:prstDash val="solid"/>
+                      <a:round/>
+                      <a:headEnd type="none" w="med" len="med"/>
+                      <a:tailEnd type="none" w="med" len="med"/>
+                    </a:lnR>
+                    <a:lnT w="9525" cap="flat" cmpd="sng" algn="ctr">
+                      <a:solidFill>
+                        <a:srgbClr val="FFFFFF"/>
+                      </a:solidFill>
+                      <a:prstDash val="solid"/>
+                      <a:round/>
+                      <a:headEnd type="none" w="med" len="med"/>
+                      <a:tailEnd type="none" w="med" len="med"/>
+                    </a:lnT>
+                    <a:lnB w="9525" cap="flat" cmpd="sng" algn="ctr">
+                      <a:solidFill>
+                        <a:srgbClr val="FFFFFF"/>
+                      </a:solidFill>
+                      <a:prstDash val="solid"/>
+                      <a:round/>
+                      <a:headEnd type="none" w="med" len="med"/>
+                      <a:tailEnd type="none" w="med" len="med"/>
+                    </a:lnB>
+                    <a:solidFill>
+                      <a:srgbClr val="FFFFFF"/>
+                    </a:solidFill>
+                  </a:tcPr>
+                </a:tc>
+                <a:tc>
+                  <a:txBody>
+                    <a:bodyPr/>
+                    <a:lstStyle/>
+                    <a:p>
+                      <a:pPr algn="ctr" indent="0" marL="0">
+                        <a:buNone/>
+                      </a:pPr>
+                      <a:r>
+                        <a:rPr lang="en-US" sz="1050" b="1" dirty="0">
+                          <a:solidFill>
+                            <a:srgbClr val="2EA9B6"/>
+                          </a:solidFill>
+                        </a:rPr>
+                        <a:t>+9.08億</a:t>
+                      </a:r>
+                      <a:endParaRPr lang="en-US" sz="1050" dirty="0"/>
+                    </a:p>
+                  </a:txBody>
+                  <a:tcPr marL="36576" marR="36576" marT="36576" marB="36576" anchor="ctr">
+                    <a:lnL w="9525" cap="flat" cmpd="sng" algn="ctr">
+                      <a:solidFill>
+                        <a:srgbClr val="FFFFFF"/>
+                      </a:solidFill>
+                      <a:prstDash val="solid"/>
+                      <a:round/>
+                      <a:headEnd type="none" w="med" len="med"/>
+                      <a:tailEnd type="none" w="med" len="med"/>
+                    </a:lnL>
+                    <a:lnR w="9525" cap="flat" cmpd="sng" algn="ctr">
+                      <a:solidFill>
+                        <a:srgbClr val="FFFFFF"/>
+                      </a:solidFill>
+                      <a:prstDash val="solid"/>
+                      <a:round/>
+                      <a:headEnd type="none" w="med" len="med"/>
+                      <a:tailEnd type="none" w="med" len="med"/>
+                    </a:lnR>
+                    <a:lnT w="9525" cap="flat" cmpd="sng" algn="ctr">
+                      <a:solidFill>
+                        <a:srgbClr val="FFFFFF"/>
+                      </a:solidFill>
+                      <a:prstDash val="solid"/>
+                      <a:round/>
+                      <a:headEnd type="none" w="med" len="med"/>
+                      <a:tailEnd type="none" w="med" len="med"/>
+                    </a:lnT>
+                    <a:lnB w="9525" cap="flat" cmpd="sng" algn="ctr">
+                      <a:solidFill>
+                        <a:srgbClr val="FFFFFF"/>
+                      </a:solidFill>
+                      <a:prstDash val="solid"/>
+                      <a:round/>
+                      <a:headEnd type="none" w="med" len="med"/>
+                      <a:tailEnd type="none" w="med" len="med"/>
+                    </a:lnB>
+                    <a:solidFill>
+                      <a:srgbClr val="FFFFFF"/>
+                    </a:solidFill>
+                  </a:tcPr>
+                </a:tc>
+                <a:tc>
+                  <a:txBody>
+                    <a:bodyPr/>
+                    <a:lstStyle/>
+                    <a:p>
+                      <a:pPr algn="ctr" indent="0" marL="0">
+                        <a:buNone/>
+                      </a:pPr>
+                      <a:r>
+                        <a:rPr lang="en-US" sz="1050" b="1" dirty="0">
+                          <a:solidFill>
+                            <a:srgbClr val="2EA9B6"/>
+                          </a:solidFill>
+                        </a:rPr>
+                        <a:t>60%</a:t>
+                      </a:r>
+                      <a:endParaRPr lang="en-US" sz="1050" dirty="0"/>
+                    </a:p>
+                  </a:txBody>
+                  <a:tcPr marL="36576" marR="36576" marT="36576" marB="36576" anchor="ctr">
+                    <a:lnL w="9525" cap="flat" cmpd="sng" algn="ctr">
+                      <a:solidFill>
+                        <a:srgbClr val="FFFFFF"/>
+                      </a:solidFill>
+                      <a:prstDash val="solid"/>
+                      <a:round/>
+                      <a:headEnd type="none" w="med" len="med"/>
+                      <a:tailEnd type="none" w="med" len="med"/>
+                    </a:lnL>
+                    <a:lnR w="9525" cap="flat" cmpd="sng" algn="ctr">
+                      <a:solidFill>
+                        <a:srgbClr val="FFFFFF"/>
+                      </a:solidFill>
+                      <a:prstDash val="solid"/>
+                      <a:round/>
+                      <a:headEnd type="none" w="med" len="med"/>
+                      <a:tailEnd type="none" w="med" len="med"/>
+                    </a:lnR>
+                    <a:lnT w="9525" cap="flat" cmpd="sng" algn="ctr">
+                      <a:solidFill>
+                        <a:srgbClr val="FFFFFF"/>
+                      </a:solidFill>
+                      <a:prstDash val="solid"/>
+                      <a:round/>
+                      <a:headEnd type="none" w="med" len="med"/>
+                      <a:tailEnd type="none" w="med" len="med"/>
+                    </a:lnT>
+                    <a:lnB w="9525" cap="flat" cmpd="sng" algn="ctr">
+                      <a:solidFill>
+                        <a:srgbClr val="FFFFFF"/>
+                      </a:solidFill>
+                      <a:prstDash val="solid"/>
+                      <a:round/>
+                      <a:headEnd type="none" w="med" len="med"/>
+                      <a:tailEnd type="none" w="med" len="med"/>
+                    </a:lnB>
+                    <a:solidFill>
+                      <a:srgbClr val="FFFFFF"/>
+                    </a:solidFill>
+                  </a:tcPr>
+                </a:tc>
+              </a:tr>
+              <a:tr h="228600">
+                <a:tc>
+                  <a:txBody>
+                    <a:bodyPr/>
+                    <a:lstStyle/>
+                    <a:p>
+                      <a:pPr algn="ctr" indent="0" marL="0">
+                        <a:buNone/>
+                      </a:pPr>
+                      <a:r>
+                        <a:rPr lang="en-US" sz="1000" dirty="0">
+                          <a:solidFill>
+                            <a:srgbClr val="404040"/>
+                          </a:solidFill>
+                        </a:rPr>
+                        <a:t>　其中 績優 130%以上</a:t>
+                      </a:r>
+                      <a:endParaRPr lang="en-US" sz="1000" dirty="0"/>
+                    </a:p>
+                  </a:txBody>
+                  <a:tcPr marL="36576" marR="36576" marT="36576" marB="36576" anchor="ctr">
+                    <a:lnL w="9525" cap="flat" cmpd="sng" algn="ctr">
+                      <a:solidFill>
+                        <a:srgbClr val="FFFFFF"/>
+                      </a:solidFill>
+                      <a:prstDash val="solid"/>
+                      <a:round/>
+                      <a:headEnd type="none" w="med" len="med"/>
+                      <a:tailEnd type="none" w="med" len="med"/>
+                    </a:lnL>
+                    <a:lnR w="9525" cap="flat" cmpd="sng" algn="ctr">
+                      <a:solidFill>
+                        <a:srgbClr val="FFFFFF"/>
+                      </a:solidFill>
+                      <a:prstDash val="solid"/>
+                      <a:round/>
+                      <a:headEnd type="none" w="med" len="med"/>
+                      <a:tailEnd type="none" w="med" len="med"/>
+                    </a:lnR>
+                    <a:lnT w="9525" cap="flat" cmpd="sng" algn="ctr">
+                      <a:solidFill>
+                        <a:srgbClr val="FFFFFF"/>
+                      </a:solidFill>
+                      <a:prstDash val="solid"/>
+                      <a:round/>
+                      <a:headEnd type="none" w="med" len="med"/>
+                      <a:tailEnd type="none" w="med" len="med"/>
+                    </a:lnT>
+                    <a:lnB w="9525" cap="flat" cmpd="sng" algn="ctr">
+                      <a:solidFill>
+                        <a:srgbClr val="FFFFFF"/>
+                      </a:solidFill>
+                      <a:prstDash val="solid"/>
+                      <a:round/>
+                      <a:headEnd type="none" w="med" len="med"/>
+                      <a:tailEnd type="none" w="med" len="med"/>
+                    </a:lnB>
+                    <a:solidFill>
+                      <a:srgbClr val="FDF1E9"/>
+                    </a:solidFill>
+                  </a:tcPr>
+                </a:tc>
+                <a:tc>
+                  <a:txBody>
+                    <a:bodyPr/>
+                    <a:lstStyle/>
+                    <a:p>
+                      <a:pPr algn="ctr" indent="0" marL="0">
+                        <a:buNone/>
+                      </a:pPr>
+                      <a:r>
+                        <a:rPr lang="en-US" sz="1000" dirty="0">
+                          <a:solidFill>
+                            <a:srgbClr val="404040"/>
+                          </a:solidFill>
+                        </a:rPr>
+                        <a:t>16家</a:t>
+                      </a:r>
+                      <a:endParaRPr lang="en-US" sz="1000" dirty="0"/>
+                    </a:p>
+                  </a:txBody>
+                  <a:tcPr marL="36576" marR="36576" marT="36576" marB="36576" anchor="ctr">
+                    <a:lnL w="9525" cap="flat" cmpd="sng" algn="ctr">
+                      <a:solidFill>
+                        <a:srgbClr val="FFFFFF"/>
+                      </a:solidFill>
+                      <a:prstDash val="solid"/>
+                      <a:round/>
+                      <a:headEnd type="none" w="med" len="med"/>
+                      <a:tailEnd type="none" w="med" len="med"/>
+                    </a:lnL>
+                    <a:lnR w="9525" cap="flat" cmpd="sng" algn="ctr">
+                      <a:solidFill>
+                        <a:srgbClr val="FFFFFF"/>
+                      </a:solidFill>
+                      <a:prstDash val="solid"/>
+                      <a:round/>
+                      <a:headEnd type="none" w="med" len="med"/>
+                      <a:tailEnd type="none" w="med" len="med"/>
+                    </a:lnR>
+                    <a:lnT w="9525" cap="flat" cmpd="sng" algn="ctr">
+                      <a:solidFill>
+                        <a:srgbClr val="FFFFFF"/>
+                      </a:solidFill>
+                      <a:prstDash val="solid"/>
+                      <a:round/>
+                      <a:headEnd type="none" w="med" len="med"/>
+                      <a:tailEnd type="none" w="med" len="med"/>
+                    </a:lnT>
+                    <a:lnB w="9525" cap="flat" cmpd="sng" algn="ctr">
+                      <a:solidFill>
+                        <a:srgbClr val="FFFFFF"/>
+                      </a:solidFill>
+                      <a:prstDash val="solid"/>
+                      <a:round/>
+                      <a:headEnd type="none" w="med" len="med"/>
+                      <a:tailEnd type="none" w="med" len="med"/>
+                    </a:lnB>
+                    <a:solidFill>
+                      <a:srgbClr val="FDF1E9"/>
+                    </a:solidFill>
+                  </a:tcPr>
+                </a:tc>
+                <a:tc>
+                  <a:txBody>
+                    <a:bodyPr/>
+                    <a:lstStyle/>
+                    <a:p>
+                      <a:pPr algn="ctr" indent="0" marL="0">
+                        <a:buNone/>
+                      </a:pPr>
+                      <a:r>
+                        <a:rPr lang="en-US" sz="1000" dirty="0">
+                          <a:solidFill>
+                            <a:srgbClr val="404040"/>
+                          </a:solidFill>
+                        </a:rPr>
+                        <a:t>+3.76億</a:t>
+                      </a:r>
+                      <a:endParaRPr lang="en-US" sz="1000" dirty="0"/>
+                    </a:p>
+                  </a:txBody>
+                  <a:tcPr marL="36576" marR="36576" marT="36576" marB="36576" anchor="ctr">
+                    <a:lnL w="9525" cap="flat" cmpd="sng" algn="ctr">
+                      <a:solidFill>
+                        <a:srgbClr val="FFFFFF"/>
+                      </a:solidFill>
+                      <a:prstDash val="solid"/>
+                      <a:round/>
+                      <a:headEnd type="none" w="med" len="med"/>
+                      <a:tailEnd type="none" w="med" len="med"/>
+                    </a:lnL>
+                    <a:lnR w="9525" cap="flat" cmpd="sng" algn="ctr">
+                      <a:solidFill>
+                        <a:srgbClr val="FFFFFF"/>
+                      </a:solidFill>
+                      <a:prstDash val="solid"/>
+                      <a:round/>
+                      <a:headEnd type="none" w="med" len="med"/>
+                      <a:tailEnd type="none" w="med" len="med"/>
+                    </a:lnR>
+                    <a:lnT w="9525" cap="flat" cmpd="sng" algn="ctr">
+                      <a:solidFill>
+                        <a:srgbClr val="FFFFFF"/>
+                      </a:solidFill>
+                      <a:prstDash val="solid"/>
+                      <a:round/>
+                      <a:headEnd type="none" w="med" len="med"/>
+                      <a:tailEnd type="none" w="med" len="med"/>
+                    </a:lnT>
+                    <a:lnB w="9525" cap="flat" cmpd="sng" algn="ctr">
+                      <a:solidFill>
+                        <a:srgbClr val="FFFFFF"/>
+                      </a:solidFill>
+                      <a:prstDash val="solid"/>
+                      <a:round/>
+                      <a:headEnd type="none" w="med" len="med"/>
+                      <a:tailEnd type="none" w="med" len="med"/>
+                    </a:lnB>
+                    <a:solidFill>
+                      <a:srgbClr val="FDF1E9"/>
+                    </a:solidFill>
+                  </a:tcPr>
+                </a:tc>
+                <a:tc>
+                  <a:txBody>
+                    <a:bodyPr/>
+                    <a:lstStyle/>
+                    <a:p>
+                      <a:pPr algn="ctr" indent="0" marL="0">
+                        <a:buNone/>
+                      </a:pPr>
+                      <a:r>
+                        <a:rPr lang="en-US" sz="1000" dirty="0">
+                          <a:solidFill>
+                            <a:srgbClr val="404040"/>
+                          </a:solidFill>
+                        </a:rPr>
+                        <a:t>25%</a:t>
+                      </a:r>
+                      <a:endParaRPr lang="en-US" sz="1000" dirty="0"/>
+                    </a:p>
+                  </a:txBody>
+                  <a:tcPr marL="36576" marR="36576" marT="36576" marB="36576" anchor="ctr">
+                    <a:lnL w="9525" cap="flat" cmpd="sng" algn="ctr">
+                      <a:solidFill>
+                        <a:srgbClr val="FFFFFF"/>
+                      </a:solidFill>
+                      <a:prstDash val="solid"/>
+                      <a:round/>
+                      <a:headEnd type="none" w="med" len="med"/>
+                      <a:tailEnd type="none" w="med" len="med"/>
+                    </a:lnL>
+                    <a:lnR w="9525" cap="flat" cmpd="sng" algn="ctr">
+                      <a:solidFill>
+                        <a:srgbClr val="FFFFFF"/>
+                      </a:solidFill>
+                      <a:prstDash val="solid"/>
+                      <a:round/>
+                      <a:headEnd type="none" w="med" len="med"/>
+                      <a:tailEnd type="none" w="med" len="med"/>
+                    </a:lnR>
+                    <a:lnT w="9525" cap="flat" cmpd="sng" algn="ctr">
+                      <a:solidFill>
+                        <a:srgbClr val="FFFFFF"/>
+                      </a:solidFill>
+                      <a:prstDash val="solid"/>
+                      <a:round/>
+                      <a:headEnd type="none" w="med" len="med"/>
+                      <a:tailEnd type="none" w="med" len="med"/>
+                    </a:lnT>
+                    <a:lnB w="9525" cap="flat" cmpd="sng" algn="ctr">
+                      <a:solidFill>
+                        <a:srgbClr val="FFFFFF"/>
+                      </a:solidFill>
+                      <a:prstDash val="solid"/>
+                      <a:round/>
+                      <a:headEnd type="none" w="med" len="med"/>
+                      <a:tailEnd type="none" w="med" len="med"/>
+                    </a:lnB>
+                    <a:solidFill>
+                      <a:srgbClr val="FDF1E9"/>
+                    </a:solidFill>
+                  </a:tcPr>
+                </a:tc>
+              </a:tr>
+              <a:tr h="228600">
+                <a:tc>
+                  <a:txBody>
+                    <a:bodyPr/>
+                    <a:lstStyle/>
+                    <a:p>
+                      <a:pPr algn="ctr" indent="0" marL="0">
+                        <a:buNone/>
+                      </a:pPr>
+                      <a:r>
+                        <a:rPr lang="en-US" sz="1000" dirty="0">
+                          <a:solidFill>
+                            <a:srgbClr val="404040"/>
+                          </a:solidFill>
+                        </a:rPr>
+                        <a:t>　其中 100～130%</a:t>
+                      </a:r>
+                      <a:endParaRPr lang="en-US" sz="1000" dirty="0"/>
+                    </a:p>
+                  </a:txBody>
+                  <a:tcPr marL="36576" marR="36576" marT="36576" marB="36576" anchor="ctr">
+                    <a:lnL w="9525" cap="flat" cmpd="sng" algn="ctr">
+                      <a:solidFill>
+                        <a:srgbClr val="FFFFFF"/>
+                      </a:solidFill>
+                      <a:prstDash val="solid"/>
+                      <a:round/>
+                      <a:headEnd type="none" w="med" len="med"/>
+                      <a:tailEnd type="none" w="med" len="med"/>
+                    </a:lnL>
+                    <a:lnR w="9525" cap="flat" cmpd="sng" algn="ctr">
+                      <a:solidFill>
+                        <a:srgbClr val="FFFFFF"/>
+                      </a:solidFill>
+                      <a:prstDash val="solid"/>
+                      <a:round/>
+                      <a:headEnd type="none" w="med" len="med"/>
+                      <a:tailEnd type="none" w="med" len="med"/>
+                    </a:lnR>
+                    <a:lnT w="9525" cap="flat" cmpd="sng" algn="ctr">
+                      <a:solidFill>
+                        <a:srgbClr val="FFFFFF"/>
+                      </a:solidFill>
+                      <a:prstDash val="solid"/>
+                      <a:round/>
+                      <a:headEnd type="none" w="med" len="med"/>
+                      <a:tailEnd type="none" w="med" len="med"/>
+                    </a:lnT>
+                    <a:lnB w="9525" cap="flat" cmpd="sng" algn="ctr">
+                      <a:solidFill>
+                        <a:srgbClr val="FFFFFF"/>
+                      </a:solidFill>
+                      <a:prstDash val="solid"/>
+                      <a:round/>
+                      <a:headEnd type="none" w="med" len="med"/>
+                      <a:tailEnd type="none" w="med" len="med"/>
+                    </a:lnB>
+                    <a:solidFill>
+                      <a:srgbClr val="FFFFFF"/>
+                    </a:solidFill>
+                  </a:tcPr>
+                </a:tc>
+                <a:tc>
+                  <a:txBody>
+                    <a:bodyPr/>
+                    <a:lstStyle/>
+                    <a:p>
+                      <a:pPr algn="ctr" indent="0" marL="0">
+                        <a:buNone/>
+                      </a:pPr>
+                      <a:r>
+                        <a:rPr lang="en-US" sz="1000" dirty="0">
+                          <a:solidFill>
+                            <a:srgbClr val="404040"/>
+                          </a:solidFill>
+                        </a:rPr>
+                        <a:t>36家</a:t>
+                      </a:r>
+                      <a:endParaRPr lang="en-US" sz="1000" dirty="0"/>
+                    </a:p>
+                  </a:txBody>
+                  <a:tcPr marL="36576" marR="36576" marT="36576" marB="36576" anchor="ctr">
+                    <a:lnL w="9525" cap="flat" cmpd="sng" algn="ctr">
+                      <a:solidFill>
+                        <a:srgbClr val="FFFFFF"/>
+                      </a:solidFill>
+                      <a:prstDash val="solid"/>
+                      <a:round/>
+                      <a:headEnd type="none" w="med" len="med"/>
+                      <a:tailEnd type="none" w="med" len="med"/>
+                    </a:lnL>
+                    <a:lnR w="9525" cap="flat" cmpd="sng" algn="ctr">
+                      <a:solidFill>
+                        <a:srgbClr val="FFFFFF"/>
+                      </a:solidFill>
+                      <a:prstDash val="solid"/>
+                      <a:round/>
+                      <a:headEnd type="none" w="med" len="med"/>
+                      <a:tailEnd type="none" w="med" len="med"/>
+                    </a:lnR>
+                    <a:lnT w="9525" cap="flat" cmpd="sng" algn="ctr">
+                      <a:solidFill>
+                        <a:srgbClr val="FFFFFF"/>
+                      </a:solidFill>
+                      <a:prstDash val="solid"/>
+                      <a:round/>
+                      <a:headEnd type="none" w="med" len="med"/>
+                      <a:tailEnd type="none" w="med" len="med"/>
+                    </a:lnT>
+                    <a:lnB w="9525" cap="flat" cmpd="sng" algn="ctr">
+                      <a:solidFill>
+                        <a:srgbClr val="FFFFFF"/>
+                      </a:solidFill>
+                      <a:prstDash val="solid"/>
+                      <a:round/>
+                      <a:headEnd type="none" w="med" len="med"/>
+                      <a:tailEnd type="none" w="med" len="med"/>
+                    </a:lnB>
+                    <a:solidFill>
+                      <a:srgbClr val="FFFFFF"/>
+                    </a:solidFill>
+                  </a:tcPr>
+                </a:tc>
+                <a:tc>
+                  <a:txBody>
+                    <a:bodyPr/>
+                    <a:lstStyle/>
+                    <a:p>
+                      <a:pPr algn="ctr" indent="0" marL="0">
+                        <a:buNone/>
+                      </a:pPr>
+                      <a:r>
+                        <a:rPr lang="en-US" sz="1000" dirty="0">
+                          <a:solidFill>
+                            <a:srgbClr val="404040"/>
+                          </a:solidFill>
+                        </a:rPr>
+                        <a:t>+5.32億</a:t>
+                      </a:r>
+                      <a:endParaRPr lang="en-US" sz="1000" dirty="0"/>
+                    </a:p>
+                  </a:txBody>
+                  <a:tcPr marL="36576" marR="36576" marT="36576" marB="36576" anchor="ctr">
+                    <a:lnL w="9525" cap="flat" cmpd="sng" algn="ctr">
+                      <a:solidFill>
+                        <a:srgbClr val="FFFFFF"/>
+                      </a:solidFill>
+                      <a:prstDash val="solid"/>
+                      <a:round/>
+                      <a:headEnd type="none" w="med" len="med"/>
+                      <a:tailEnd type="none" w="med" len="med"/>
+                    </a:lnL>
+                    <a:lnR w="9525" cap="flat" cmpd="sng" algn="ctr">
+                      <a:solidFill>
+                        <a:srgbClr val="FFFFFF"/>
+                      </a:solidFill>
+                      <a:prstDash val="solid"/>
+                      <a:round/>
+                      <a:headEnd type="none" w="med" len="med"/>
+                      <a:tailEnd type="none" w="med" len="med"/>
+                    </a:lnR>
+                    <a:lnT w="9525" cap="flat" cmpd="sng" algn="ctr">
+                      <a:solidFill>
+                        <a:srgbClr val="FFFFFF"/>
+                      </a:solidFill>
+                      <a:prstDash val="solid"/>
+                      <a:round/>
+                      <a:headEnd type="none" w="med" len="med"/>
+                      <a:tailEnd type="none" w="med" len="med"/>
+                    </a:lnT>
+                    <a:lnB w="9525" cap="flat" cmpd="sng" algn="ctr">
+                      <a:solidFill>
+                        <a:srgbClr val="FFFFFF"/>
+                      </a:solidFill>
+                      <a:prstDash val="solid"/>
+                      <a:round/>
+                      <a:headEnd type="none" w="med" len="med"/>
+                      <a:tailEnd type="none" w="med" len="med"/>
+                    </a:lnB>
+                    <a:solidFill>
+                      <a:srgbClr val="FFFFFF"/>
+                    </a:solidFill>
+                  </a:tcPr>
+                </a:tc>
+                <a:tc>
+                  <a:txBody>
+                    <a:bodyPr/>
+                    <a:lstStyle/>
+                    <a:p>
+                      <a:pPr algn="ctr" indent="0" marL="0">
+                        <a:buNone/>
+                      </a:pPr>
+                      <a:r>
+                        <a:rPr lang="en-US" sz="1000" dirty="0">
+                          <a:solidFill>
+                            <a:srgbClr val="404040"/>
+                          </a:solidFill>
+                        </a:rPr>
+                        <a:t>35%</a:t>
+                      </a:r>
+                      <a:endParaRPr lang="en-US" sz="1000" dirty="0"/>
+                    </a:p>
+                  </a:txBody>
+                  <a:tcPr marL="36576" marR="36576" marT="36576" marB="36576" anchor="ctr">
+                    <a:lnL w="9525" cap="flat" cmpd="sng" algn="ctr">
+                      <a:solidFill>
+                        <a:srgbClr val="FFFFFF"/>
+                      </a:solidFill>
+                      <a:prstDash val="solid"/>
+                      <a:round/>
+                      <a:headEnd type="none" w="med" len="med"/>
+                      <a:tailEnd type="none" w="med" len="med"/>
+                    </a:lnL>
+                    <a:lnR w="9525" cap="flat" cmpd="sng" algn="ctr">
+                      <a:solidFill>
+                        <a:srgbClr val="FFFFFF"/>
+                      </a:solidFill>
+                      <a:prstDash val="solid"/>
+                      <a:round/>
+                      <a:headEnd type="none" w="med" len="med"/>
+                      <a:tailEnd type="none" w="med" len="med"/>
+                    </a:lnR>
+                    <a:lnT w="9525" cap="flat" cmpd="sng" algn="ctr">
+                      <a:solidFill>
+                        <a:srgbClr val="FFFFFF"/>
+                      </a:solidFill>
+                      <a:prstDash val="solid"/>
+                      <a:round/>
+                      <a:headEnd type="none" w="med" len="med"/>
+                      <a:tailEnd type="none" w="med" len="med"/>
+                    </a:lnT>
+                    <a:lnB w="9525" cap="flat" cmpd="sng" algn="ctr">
+                      <a:solidFill>
+                        <a:srgbClr val="FFFFFF"/>
+                      </a:solidFill>
+                      <a:prstDash val="solid"/>
+                      <a:round/>
+                      <a:headEnd type="none" w="med" len="med"/>
+                      <a:tailEnd type="none" w="med" len="med"/>
+                    </a:lnB>
+                    <a:solidFill>
+                      <a:srgbClr val="FFFFFF"/>
+                    </a:solidFill>
+                  </a:tcPr>
+                </a:tc>
+              </a:tr>
+              <a:tr h="228600">
+                <a:tc>
+                  <a:txBody>
+                    <a:bodyPr/>
+                    <a:lstStyle/>
+                    <a:p>
+                      <a:pPr algn="ctr" indent="0" marL="0">
+                        <a:buNone/>
+                      </a:pPr>
+                      <a:r>
+                        <a:rPr lang="en-US" sz="1050" b="1" dirty="0">
                           <a:solidFill>
                             <a:srgbClr val="000000"/>
                           </a:solidFill>
                         </a:rPr>
-                        <a:t>達標群（≥100%）</a:t>
+                        <a:t>未達標群（&lt;100%）</a:t>
                       </a:r>
-                      <a:endParaRPr lang="en-US" sz="1200" dirty="0"/>
-                    </a:p>
-                  </a:txBody>
-                  <a:tcPr marL="36576" marR="36576" marT="36576" marB="36576" anchor="ctr">
-                    <a:lnL w="9525" cap="flat" cmpd="sng" algn="ctr">
-                      <a:solidFill>
-                        <a:srgbClr val="FFFFFF"/>
-                      </a:solidFill>
-                      <a:prstDash val="solid"/>
-                      <a:round/>
-                      <a:headEnd type="none" w="med" len="med"/>
-                      <a:tailEnd type="none" w="med" len="med"/>
-                    </a:lnL>
-                    <a:lnR w="9525" cap="flat" cmpd="sng" algn="ctr">
-                      <a:solidFill>
-                        <a:srgbClr val="FFFFFF"/>
-                      </a:solidFill>
-                      <a:prstDash val="solid"/>
-                      <a:round/>
-                      <a:headEnd type="none" w="med" len="med"/>
-                      <a:tailEnd type="none" w="med" len="med"/>
-                    </a:lnR>
-                    <a:lnT w="9525" cap="flat" cmpd="sng" algn="ctr">
-                      <a:solidFill>
-                        <a:srgbClr val="FFFFFF"/>
-                      </a:solidFill>
-                      <a:prstDash val="solid"/>
-                      <a:round/>
-                      <a:headEnd type="none" w="med" len="med"/>
-                      <a:tailEnd type="none" w="med" len="med"/>
-                    </a:lnT>
-                    <a:lnB w="9525" cap="flat" cmpd="sng" algn="ctr">
-                      <a:solidFill>
-                        <a:srgbClr val="FFFFFF"/>
-                      </a:solidFill>
-                      <a:prstDash val="solid"/>
-                      <a:round/>
-                      <a:headEnd type="none" w="med" len="med"/>
-                      <a:tailEnd type="none" w="med" len="med"/>
-                    </a:lnB>
-                    <a:solidFill>
-                      <a:srgbClr val="FFFFFF"/>
+                      <a:endParaRPr lang="en-US" sz="1050" dirty="0"/>
+                    </a:p>
+                  </a:txBody>
+                  <a:tcPr marL="36576" marR="36576" marT="36576" marB="36576" anchor="ctr">
+                    <a:lnL w="9525" cap="flat" cmpd="sng" algn="ctr">
+                      <a:solidFill>
+                        <a:srgbClr val="FFFFFF"/>
+                      </a:solidFill>
+                      <a:prstDash val="solid"/>
+                      <a:round/>
+                      <a:headEnd type="none" w="med" len="med"/>
+                      <a:tailEnd type="none" w="med" len="med"/>
+                    </a:lnL>
+                    <a:lnR w="9525" cap="flat" cmpd="sng" algn="ctr">
+                      <a:solidFill>
+                        <a:srgbClr val="FFFFFF"/>
+                      </a:solidFill>
+                      <a:prstDash val="solid"/>
+                      <a:round/>
+                      <a:headEnd type="none" w="med" len="med"/>
+                      <a:tailEnd type="none" w="med" len="med"/>
+                    </a:lnR>
+                    <a:lnT w="9525" cap="flat" cmpd="sng" algn="ctr">
+                      <a:solidFill>
+                        <a:srgbClr val="FFFFFF"/>
+                      </a:solidFill>
+                      <a:prstDash val="solid"/>
+                      <a:round/>
+                      <a:headEnd type="none" w="med" len="med"/>
+                      <a:tailEnd type="none" w="med" len="med"/>
+                    </a:lnT>
+                    <a:lnB w="9525" cap="flat" cmpd="sng" algn="ctr">
+                      <a:solidFill>
+                        <a:srgbClr val="FFFFFF"/>
+                      </a:solidFill>
+                      <a:prstDash val="solid"/>
+                      <a:round/>
+                      <a:headEnd type="none" w="med" len="med"/>
+                      <a:tailEnd type="none" w="med" len="med"/>
+                    </a:lnB>
+                    <a:solidFill>
+                      <a:srgbClr val="FDF1E9"/>
                     </a:solidFill>
                   </a:tcPr>
                 </a:tc>
@@ -12226,55 +12937,55 @@
                         <a:buNone/>
                       </a:pPr>
                       <a:r>
-                        <a:rPr lang="en-US" sz="1300" dirty="0">
+                        <a:rPr lang="en-US" sz="1050" b="1" dirty="0">
                           <a:solidFill>
                             <a:srgbClr val="000000"/>
                           </a:solidFill>
                         </a:rPr>
-                        <a:t>18家</a:t>
+                        <a:t>47家</a:t>
                       </a:r>
-                      <a:endParaRPr lang="en-US" sz="1300" dirty="0"/>
-                    </a:p>
-                  </a:txBody>
-                  <a:tcPr marL="36576" marR="36576" marT="36576" marB="36576" anchor="ctr">
-                    <a:lnL w="9525" cap="flat" cmpd="sng" algn="ctr">
-                      <a:solidFill>
-                        <a:srgbClr val="FFFFFF"/>
-                      </a:solidFill>
-                      <a:prstDash val="solid"/>
-                      <a:round/>
-                      <a:headEnd type="none" w="med" len="med"/>
-                      <a:tailEnd type="none" w="med" len="med"/>
-                    </a:lnL>
-                    <a:lnR w="9525" cap="flat" cmpd="sng" algn="ctr">
-                      <a:solidFill>
-                        <a:srgbClr val="FFFFFF"/>
-                      </a:solidFill>
-                      <a:prstDash val="solid"/>
-                      <a:round/>
-                      <a:headEnd type="none" w="med" len="med"/>
-                      <a:tailEnd type="none" w="med" len="med"/>
-                    </a:lnR>
-                    <a:lnT w="9525" cap="flat" cmpd="sng" algn="ctr">
-                      <a:solidFill>
-                        <a:srgbClr val="FFFFFF"/>
-                      </a:solidFill>
-                      <a:prstDash val="solid"/>
-                      <a:round/>
-                      <a:headEnd type="none" w="med" len="med"/>
-                      <a:tailEnd type="none" w="med" len="med"/>
-                    </a:lnT>
-                    <a:lnB w="9525" cap="flat" cmpd="sng" algn="ctr">
-                      <a:solidFill>
-                        <a:srgbClr val="FFFFFF"/>
-                      </a:solidFill>
-                      <a:prstDash val="solid"/>
-                      <a:round/>
-                      <a:headEnd type="none" w="med" len="med"/>
-                      <a:tailEnd type="none" w="med" len="med"/>
-                    </a:lnB>
-                    <a:solidFill>
-                      <a:srgbClr val="FFFFFF"/>
+                      <a:endParaRPr lang="en-US" sz="1050" dirty="0"/>
+                    </a:p>
+                  </a:txBody>
+                  <a:tcPr marL="36576" marR="36576" marT="36576" marB="36576" anchor="ctr">
+                    <a:lnL w="9525" cap="flat" cmpd="sng" algn="ctr">
+                      <a:solidFill>
+                        <a:srgbClr val="FFFFFF"/>
+                      </a:solidFill>
+                      <a:prstDash val="solid"/>
+                      <a:round/>
+                      <a:headEnd type="none" w="med" len="med"/>
+                      <a:tailEnd type="none" w="med" len="med"/>
+                    </a:lnL>
+                    <a:lnR w="9525" cap="flat" cmpd="sng" algn="ctr">
+                      <a:solidFill>
+                        <a:srgbClr val="FFFFFF"/>
+                      </a:solidFill>
+                      <a:prstDash val="solid"/>
+                      <a:round/>
+                      <a:headEnd type="none" w="med" len="med"/>
+                      <a:tailEnd type="none" w="med" len="med"/>
+                    </a:lnR>
+                    <a:lnT w="9525" cap="flat" cmpd="sng" algn="ctr">
+                      <a:solidFill>
+                        <a:srgbClr val="FFFFFF"/>
+                      </a:solidFill>
+                      <a:prstDash val="solid"/>
+                      <a:round/>
+                      <a:headEnd type="none" w="med" len="med"/>
+                      <a:tailEnd type="none" w="med" len="med"/>
+                    </a:lnT>
+                    <a:lnB w="9525" cap="flat" cmpd="sng" algn="ctr">
+                      <a:solidFill>
+                        <a:srgbClr val="FFFFFF"/>
+                      </a:solidFill>
+                      <a:prstDash val="solid"/>
+                      <a:round/>
+                      <a:headEnd type="none" w="med" len="med"/>
+                      <a:tailEnd type="none" w="med" len="med"/>
+                    </a:lnB>
+                    <a:solidFill>
+                      <a:srgbClr val="FDF1E9"/>
                     </a:solidFill>
                   </a:tcPr>
                 </a:tc>
@@ -12287,55 +12998,55 @@
                         <a:buNone/>
                       </a:pPr>
                       <a:r>
-                        <a:rPr lang="en-US" sz="1300" dirty="0">
+                        <a:rPr lang="en-US" sz="1050" b="1" dirty="0">
                           <a:solidFill>
                             <a:srgbClr val="000000"/>
                           </a:solidFill>
                         </a:rPr>
-                        <a:t>−1.13億</a:t>
+                        <a:t>+6.16億</a:t>
                       </a:r>
-                      <a:endParaRPr lang="en-US" sz="1300" dirty="0"/>
-                    </a:p>
-                  </a:txBody>
-                  <a:tcPr marL="36576" marR="36576" marT="36576" marB="36576" anchor="ctr">
-                    <a:lnL w="9525" cap="flat" cmpd="sng" algn="ctr">
-                      <a:solidFill>
-                        <a:srgbClr val="FFFFFF"/>
-                      </a:solidFill>
-                      <a:prstDash val="solid"/>
-                      <a:round/>
-                      <a:headEnd type="none" w="med" len="med"/>
-                      <a:tailEnd type="none" w="med" len="med"/>
-                    </a:lnL>
-                    <a:lnR w="9525" cap="flat" cmpd="sng" algn="ctr">
-                      <a:solidFill>
-                        <a:srgbClr val="FFFFFF"/>
-                      </a:solidFill>
-                      <a:prstDash val="solid"/>
-                      <a:round/>
-                      <a:headEnd type="none" w="med" len="med"/>
-                      <a:tailEnd type="none" w="med" len="med"/>
-                    </a:lnR>
-                    <a:lnT w="9525" cap="flat" cmpd="sng" algn="ctr">
-                      <a:solidFill>
-                        <a:srgbClr val="FFFFFF"/>
-                      </a:solidFill>
-                      <a:prstDash val="solid"/>
-                      <a:round/>
-                      <a:headEnd type="none" w="med" len="med"/>
-                      <a:tailEnd type="none" w="med" len="med"/>
-                    </a:lnT>
-                    <a:lnB w="9525" cap="flat" cmpd="sng" algn="ctr">
-                      <a:solidFill>
-                        <a:srgbClr val="FFFFFF"/>
-                      </a:solidFill>
-                      <a:prstDash val="solid"/>
-                      <a:round/>
-                      <a:headEnd type="none" w="med" len="med"/>
-                      <a:tailEnd type="none" w="med" len="med"/>
-                    </a:lnB>
-                    <a:solidFill>
-                      <a:srgbClr val="FFFFFF"/>
+                      <a:endParaRPr lang="en-US" sz="1050" dirty="0"/>
+                    </a:p>
+                  </a:txBody>
+                  <a:tcPr marL="36576" marR="36576" marT="36576" marB="36576" anchor="ctr">
+                    <a:lnL w="9525" cap="flat" cmpd="sng" algn="ctr">
+                      <a:solidFill>
+                        <a:srgbClr val="FFFFFF"/>
+                      </a:solidFill>
+                      <a:prstDash val="solid"/>
+                      <a:round/>
+                      <a:headEnd type="none" w="med" len="med"/>
+                      <a:tailEnd type="none" w="med" len="med"/>
+                    </a:lnL>
+                    <a:lnR w="9525" cap="flat" cmpd="sng" algn="ctr">
+                      <a:solidFill>
+                        <a:srgbClr val="FFFFFF"/>
+                      </a:solidFill>
+                      <a:prstDash val="solid"/>
+                      <a:round/>
+                      <a:headEnd type="none" w="med" len="med"/>
+                      <a:tailEnd type="none" w="med" len="med"/>
+                    </a:lnR>
+                    <a:lnT w="9525" cap="flat" cmpd="sng" algn="ctr">
+                      <a:solidFill>
+                        <a:srgbClr val="FFFFFF"/>
+                      </a:solidFill>
+                      <a:prstDash val="solid"/>
+                      <a:round/>
+                      <a:headEnd type="none" w="med" len="med"/>
+                      <a:tailEnd type="none" w="med" len="med"/>
+                    </a:lnT>
+                    <a:lnB w="9525" cap="flat" cmpd="sng" algn="ctr">
+                      <a:solidFill>
+                        <a:srgbClr val="FFFFFF"/>
+                      </a:solidFill>
+                      <a:prstDash val="solid"/>
+                      <a:round/>
+                      <a:headEnd type="none" w="med" len="med"/>
+                      <a:tailEnd type="none" w="med" len="med"/>
+                    </a:lnB>
+                    <a:solidFill>
+                      <a:srgbClr val="FDF1E9"/>
                     </a:solidFill>
                   </a:tcPr>
                 </a:tc>
@@ -12348,60 +13059,60 @@
                         <a:buNone/>
                       </a:pPr>
                       <a:r>
-                        <a:rPr lang="en-US" sz="1300" dirty="0">
+                        <a:rPr lang="en-US" sz="1050" b="1" dirty="0">
                           <a:solidFill>
                             <a:srgbClr val="000000"/>
                           </a:solidFill>
                         </a:rPr>
-                        <a:t>14%</a:t>
+                        <a:t>40%</a:t>
                       </a:r>
-                      <a:endParaRPr lang="en-US" sz="1300" dirty="0"/>
-                    </a:p>
-                  </a:txBody>
-                  <a:tcPr marL="36576" marR="36576" marT="36576" marB="36576" anchor="ctr">
-                    <a:lnL w="9525" cap="flat" cmpd="sng" algn="ctr">
-                      <a:solidFill>
-                        <a:srgbClr val="FFFFFF"/>
-                      </a:solidFill>
-                      <a:prstDash val="solid"/>
-                      <a:round/>
-                      <a:headEnd type="none" w="med" len="med"/>
-                      <a:tailEnd type="none" w="med" len="med"/>
-                    </a:lnL>
-                    <a:lnR w="9525" cap="flat" cmpd="sng" algn="ctr">
-                      <a:solidFill>
-                        <a:srgbClr val="FFFFFF"/>
-                      </a:solidFill>
-                      <a:prstDash val="solid"/>
-                      <a:round/>
-                      <a:headEnd type="none" w="med" len="med"/>
-                      <a:tailEnd type="none" w="med" len="med"/>
-                    </a:lnR>
-                    <a:lnT w="9525" cap="flat" cmpd="sng" algn="ctr">
-                      <a:solidFill>
-                        <a:srgbClr val="FFFFFF"/>
-                      </a:solidFill>
-                      <a:prstDash val="solid"/>
-                      <a:round/>
-                      <a:headEnd type="none" w="med" len="med"/>
-                      <a:tailEnd type="none" w="med" len="med"/>
-                    </a:lnT>
-                    <a:lnB w="9525" cap="flat" cmpd="sng" algn="ctr">
-                      <a:solidFill>
-                        <a:srgbClr val="FFFFFF"/>
-                      </a:solidFill>
-                      <a:prstDash val="solid"/>
-                      <a:round/>
-                      <a:headEnd type="none" w="med" len="med"/>
-                      <a:tailEnd type="none" w="med" len="med"/>
-                    </a:lnB>
-                    <a:solidFill>
-                      <a:srgbClr val="FFFFFF"/>
+                      <a:endParaRPr lang="en-US" sz="1050" dirty="0"/>
+                    </a:p>
+                  </a:txBody>
+                  <a:tcPr marL="36576" marR="36576" marT="36576" marB="36576" anchor="ctr">
+                    <a:lnL w="9525" cap="flat" cmpd="sng" algn="ctr">
+                      <a:solidFill>
+                        <a:srgbClr val="FFFFFF"/>
+                      </a:solidFill>
+                      <a:prstDash val="solid"/>
+                      <a:round/>
+                      <a:headEnd type="none" w="med" len="med"/>
+                      <a:tailEnd type="none" w="med" len="med"/>
+                    </a:lnL>
+                    <a:lnR w="9525" cap="flat" cmpd="sng" algn="ctr">
+                      <a:solidFill>
+                        <a:srgbClr val="FFFFFF"/>
+                      </a:solidFill>
+                      <a:prstDash val="solid"/>
+                      <a:round/>
+                      <a:headEnd type="none" w="med" len="med"/>
+                      <a:tailEnd type="none" w="med" len="med"/>
+                    </a:lnR>
+                    <a:lnT w="9525" cap="flat" cmpd="sng" algn="ctr">
+                      <a:solidFill>
+                        <a:srgbClr val="FFFFFF"/>
+                      </a:solidFill>
+                      <a:prstDash val="solid"/>
+                      <a:round/>
+                      <a:headEnd type="none" w="med" len="med"/>
+                      <a:tailEnd type="none" w="med" len="med"/>
+                    </a:lnT>
+                    <a:lnB w="9525" cap="flat" cmpd="sng" algn="ctr">
+                      <a:solidFill>
+                        <a:srgbClr val="FFFFFF"/>
+                      </a:solidFill>
+                      <a:prstDash val="solid"/>
+                      <a:round/>
+                      <a:headEnd type="none" w="med" len="med"/>
+                      <a:tailEnd type="none" w="med" len="med"/>
+                    </a:lnB>
+                    <a:solidFill>
+                      <a:srgbClr val="FDF1E9"/>
                     </a:solidFill>
                   </a:tcPr>
                 </a:tc>
               </a:tr>
-              <a:tr h="301752">
+              <a:tr h="228600">
                 <a:tc>
                   <a:txBody>
                     <a:bodyPr/>
@@ -12411,260 +13122,14 @@
                         <a:buNone/>
                       </a:pPr>
                       <a:r>
-                        <a:rPr lang="en-US" sz="1200" b="1" dirty="0">
+                        <a:rPr lang="en-US" sz="1000" dirty="0">
                           <a:solidFill>
-                            <a:srgbClr val="C00000"/>
-                          </a:solidFill>
-                        </a:rPr>
-                        <a:t>未達標群（&lt;100%）</a:t>
-                      </a:r>
-                      <a:endParaRPr lang="en-US" sz="1200" dirty="0"/>
-                    </a:p>
-                  </a:txBody>
-                  <a:tcPr marL="36576" marR="36576" marT="36576" marB="36576" anchor="ctr">
-                    <a:lnL w="9525" cap="flat" cmpd="sng" algn="ctr">
-                      <a:solidFill>
-                        <a:srgbClr val="FFFFFF"/>
-                      </a:solidFill>
-                      <a:prstDash val="solid"/>
-                      <a:round/>
-                      <a:headEnd type="none" w="med" len="med"/>
-                      <a:tailEnd type="none" w="med" len="med"/>
-                    </a:lnL>
-                    <a:lnR w="9525" cap="flat" cmpd="sng" algn="ctr">
-                      <a:solidFill>
-                        <a:srgbClr val="FFFFFF"/>
-                      </a:solidFill>
-                      <a:prstDash val="solid"/>
-                      <a:round/>
-                      <a:headEnd type="none" w="med" len="med"/>
-                      <a:tailEnd type="none" w="med" len="med"/>
-                    </a:lnR>
-                    <a:lnT w="9525" cap="flat" cmpd="sng" algn="ctr">
-                      <a:solidFill>
-                        <a:srgbClr val="FFFFFF"/>
-                      </a:solidFill>
-                      <a:prstDash val="solid"/>
-                      <a:round/>
-                      <a:headEnd type="none" w="med" len="med"/>
-                      <a:tailEnd type="none" w="med" len="med"/>
-                    </a:lnT>
-                    <a:lnB w="9525" cap="flat" cmpd="sng" algn="ctr">
-                      <a:solidFill>
-                        <a:srgbClr val="FFFFFF"/>
-                      </a:solidFill>
-                      <a:prstDash val="solid"/>
-                      <a:round/>
-                      <a:headEnd type="none" w="med" len="med"/>
-                      <a:tailEnd type="none" w="med" len="med"/>
-                    </a:lnB>
-                    <a:solidFill>
-                      <a:srgbClr val="FDF1E9"/>
-                    </a:solidFill>
-                  </a:tcPr>
-                </a:tc>
-                <a:tc>
-                  <a:txBody>
-                    <a:bodyPr/>
-                    <a:lstStyle/>
-                    <a:p>
-                      <a:pPr algn="ctr" indent="0" marL="0">
-                        <a:buNone/>
-                      </a:pPr>
-                      <a:r>
-                        <a:rPr lang="en-US" sz="1300" b="1" dirty="0">
-                          <a:solidFill>
-                            <a:srgbClr val="C00000"/>
-                          </a:solidFill>
-                        </a:rPr>
-                        <a:t>66家</a:t>
-                      </a:r>
-                      <a:endParaRPr lang="en-US" sz="1300" dirty="0"/>
-                    </a:p>
-                  </a:txBody>
-                  <a:tcPr marL="36576" marR="36576" marT="36576" marB="36576" anchor="ctr">
-                    <a:lnL w="9525" cap="flat" cmpd="sng" algn="ctr">
-                      <a:solidFill>
-                        <a:srgbClr val="FFFFFF"/>
-                      </a:solidFill>
-                      <a:prstDash val="solid"/>
-                      <a:round/>
-                      <a:headEnd type="none" w="med" len="med"/>
-                      <a:tailEnd type="none" w="med" len="med"/>
-                    </a:lnL>
-                    <a:lnR w="9525" cap="flat" cmpd="sng" algn="ctr">
-                      <a:solidFill>
-                        <a:srgbClr val="FFFFFF"/>
-                      </a:solidFill>
-                      <a:prstDash val="solid"/>
-                      <a:round/>
-                      <a:headEnd type="none" w="med" len="med"/>
-                      <a:tailEnd type="none" w="med" len="med"/>
-                    </a:lnR>
-                    <a:lnT w="9525" cap="flat" cmpd="sng" algn="ctr">
-                      <a:solidFill>
-                        <a:srgbClr val="FFFFFF"/>
-                      </a:solidFill>
-                      <a:prstDash val="solid"/>
-                      <a:round/>
-                      <a:headEnd type="none" w="med" len="med"/>
-                      <a:tailEnd type="none" w="med" len="med"/>
-                    </a:lnT>
-                    <a:lnB w="9525" cap="flat" cmpd="sng" algn="ctr">
-                      <a:solidFill>
-                        <a:srgbClr val="FFFFFF"/>
-                      </a:solidFill>
-                      <a:prstDash val="solid"/>
-                      <a:round/>
-                      <a:headEnd type="none" w="med" len="med"/>
-                      <a:tailEnd type="none" w="med" len="med"/>
-                    </a:lnB>
-                    <a:solidFill>
-                      <a:srgbClr val="FDF1E9"/>
-                    </a:solidFill>
-                  </a:tcPr>
-                </a:tc>
-                <a:tc>
-                  <a:txBody>
-                    <a:bodyPr/>
-                    <a:lstStyle/>
-                    <a:p>
-                      <a:pPr algn="ctr" indent="0" marL="0">
-                        <a:buNone/>
-                      </a:pPr>
-                      <a:r>
-                        <a:rPr lang="en-US" sz="1300" b="1" dirty="0">
-                          <a:solidFill>
-                            <a:srgbClr val="C00000"/>
-                          </a:solidFill>
-                        </a:rPr>
-                        <a:t>−7.10億</a:t>
-                      </a:r>
-                      <a:endParaRPr lang="en-US" sz="1300" dirty="0"/>
-                    </a:p>
-                  </a:txBody>
-                  <a:tcPr marL="36576" marR="36576" marT="36576" marB="36576" anchor="ctr">
-                    <a:lnL w="9525" cap="flat" cmpd="sng" algn="ctr">
-                      <a:solidFill>
-                        <a:srgbClr val="FFFFFF"/>
-                      </a:solidFill>
-                      <a:prstDash val="solid"/>
-                      <a:round/>
-                      <a:headEnd type="none" w="med" len="med"/>
-                      <a:tailEnd type="none" w="med" len="med"/>
-                    </a:lnL>
-                    <a:lnR w="9525" cap="flat" cmpd="sng" algn="ctr">
-                      <a:solidFill>
-                        <a:srgbClr val="FFFFFF"/>
-                      </a:solidFill>
-                      <a:prstDash val="solid"/>
-                      <a:round/>
-                      <a:headEnd type="none" w="med" len="med"/>
-                      <a:tailEnd type="none" w="med" len="med"/>
-                    </a:lnR>
-                    <a:lnT w="9525" cap="flat" cmpd="sng" algn="ctr">
-                      <a:solidFill>
-                        <a:srgbClr val="FFFFFF"/>
-                      </a:solidFill>
-                      <a:prstDash val="solid"/>
-                      <a:round/>
-                      <a:headEnd type="none" w="med" len="med"/>
-                      <a:tailEnd type="none" w="med" len="med"/>
-                    </a:lnT>
-                    <a:lnB w="9525" cap="flat" cmpd="sng" algn="ctr">
-                      <a:solidFill>
-                        <a:srgbClr val="FFFFFF"/>
-                      </a:solidFill>
-                      <a:prstDash val="solid"/>
-                      <a:round/>
-                      <a:headEnd type="none" w="med" len="med"/>
-                      <a:tailEnd type="none" w="med" len="med"/>
-                    </a:lnB>
-                    <a:solidFill>
-                      <a:srgbClr val="FDF1E9"/>
-                    </a:solidFill>
-                  </a:tcPr>
-                </a:tc>
-                <a:tc>
-                  <a:txBody>
-                    <a:bodyPr/>
-                    <a:lstStyle/>
-                    <a:p>
-                      <a:pPr algn="ctr" indent="0" marL="0">
-                        <a:buNone/>
-                      </a:pPr>
-                      <a:r>
-                        <a:rPr lang="en-US" sz="1300" b="1" dirty="0">
-                          <a:solidFill>
-                            <a:srgbClr val="C00000"/>
-                          </a:solidFill>
-                        </a:rPr>
-                        <a:t>86%</a:t>
-                      </a:r>
-                      <a:endParaRPr lang="en-US" sz="1300" dirty="0"/>
-                    </a:p>
-                  </a:txBody>
-                  <a:tcPr marL="36576" marR="36576" marT="36576" marB="36576" anchor="ctr">
-                    <a:lnL w="9525" cap="flat" cmpd="sng" algn="ctr">
-                      <a:solidFill>
-                        <a:srgbClr val="FFFFFF"/>
-                      </a:solidFill>
-                      <a:prstDash val="solid"/>
-                      <a:round/>
-                      <a:headEnd type="none" w="med" len="med"/>
-                      <a:tailEnd type="none" w="med" len="med"/>
-                    </a:lnL>
-                    <a:lnR w="9525" cap="flat" cmpd="sng" algn="ctr">
-                      <a:solidFill>
-                        <a:srgbClr val="FFFFFF"/>
-                      </a:solidFill>
-                      <a:prstDash val="solid"/>
-                      <a:round/>
-                      <a:headEnd type="none" w="med" len="med"/>
-                      <a:tailEnd type="none" w="med" len="med"/>
-                    </a:lnR>
-                    <a:lnT w="9525" cap="flat" cmpd="sng" algn="ctr">
-                      <a:solidFill>
-                        <a:srgbClr val="FFFFFF"/>
-                      </a:solidFill>
-                      <a:prstDash val="solid"/>
-                      <a:round/>
-                      <a:headEnd type="none" w="med" len="med"/>
-                      <a:tailEnd type="none" w="med" len="med"/>
-                    </a:lnT>
-                    <a:lnB w="9525" cap="flat" cmpd="sng" algn="ctr">
-                      <a:solidFill>
-                        <a:srgbClr val="FFFFFF"/>
-                      </a:solidFill>
-                      <a:prstDash val="solid"/>
-                      <a:round/>
-                      <a:headEnd type="none" w="med" len="med"/>
-                      <a:tailEnd type="none" w="med" len="med"/>
-                    </a:lnB>
-                    <a:solidFill>
-                      <a:srgbClr val="FDF1E9"/>
-                    </a:solidFill>
-                  </a:tcPr>
-                </a:tc>
-              </a:tr>
-              <a:tr h="301752">
-                <a:tc>
-                  <a:txBody>
-                    <a:bodyPr/>
-                    <a:lstStyle/>
-                    <a:p>
-                      <a:pPr algn="ctr" indent="0" marL="0">
-                        <a:buNone/>
-                      </a:pPr>
-                      <a:r>
-                        <a:rPr lang="en-US" sz="1100" dirty="0">
-                          <a:solidFill>
-                            <a:srgbClr val="000000"/>
+                            <a:srgbClr val="404040"/>
                           </a:solidFill>
                         </a:rPr>
                         <a:t>　其中 90～100%</a:t>
                       </a:r>
-                      <a:endParaRPr lang="en-US" sz="1100" dirty="0"/>
+                      <a:endParaRPr lang="en-US" sz="1000" dirty="0"/>
                     </a:p>
                   </a:txBody>
                   <a:tcPr marL="36576" marR="36576" marT="36576" marB="36576" anchor="ctr">
@@ -12718,14 +13183,14 @@
                         <a:buNone/>
                       </a:pPr>
                       <a:r>
-                        <a:rPr lang="en-US" sz="1100" dirty="0">
+                        <a:rPr lang="en-US" sz="1000" dirty="0">
                           <a:solidFill>
-                            <a:srgbClr val="000000"/>
+                            <a:srgbClr val="404040"/>
                           </a:solidFill>
                         </a:rPr>
-                        <a:t>16家</a:t>
+                        <a:t>20家</a:t>
                       </a:r>
-                      <a:endParaRPr lang="en-US" sz="1100" dirty="0"/>
+                      <a:endParaRPr lang="en-US" sz="1000" dirty="0"/>
                     </a:p>
                   </a:txBody>
                   <a:tcPr marL="36576" marR="36576" marT="36576" marB="36576" anchor="ctr">
@@ -12779,14 +13244,14 @@
                         <a:buNone/>
                       </a:pPr>
                       <a:r>
-                        <a:rPr lang="en-US" sz="1100" dirty="0">
+                        <a:rPr lang="en-US" sz="1000" dirty="0">
                           <a:solidFill>
-                            <a:srgbClr val="000000"/>
+                            <a:srgbClr val="404040"/>
                           </a:solidFill>
                         </a:rPr>
-                        <a:t>−1.49億</a:t>
+                        <a:t>+2.80億</a:t>
                       </a:r>
-                      <a:endParaRPr lang="en-US" sz="1100" dirty="0"/>
+                      <a:endParaRPr lang="en-US" sz="1000" dirty="0"/>
                     </a:p>
                   </a:txBody>
                   <a:tcPr marL="36576" marR="36576" marT="36576" marB="36576" anchor="ctr">
@@ -12840,14 +13305,14 @@
                         <a:buNone/>
                       </a:pPr>
                       <a:r>
-                        <a:rPr lang="en-US" sz="1100" dirty="0">
+                        <a:rPr lang="en-US" sz="1000" dirty="0">
                           <a:solidFill>
-                            <a:srgbClr val="000000"/>
+                            <a:srgbClr val="404040"/>
                           </a:solidFill>
                         </a:rPr>
                         <a:t>18%</a:t>
                       </a:r>
-                      <a:endParaRPr lang="en-US" sz="1100" dirty="0"/>
+                      <a:endParaRPr lang="en-US" sz="1000" dirty="0"/>
                     </a:p>
                   </a:txBody>
                   <a:tcPr marL="36576" marR="36576" marT="36576" marB="36576" anchor="ctr">
@@ -12893,7 +13358,7 @@
                   </a:tcPr>
                 </a:tc>
               </a:tr>
-              <a:tr h="301752">
+              <a:tr h="228600">
                 <a:tc>
                   <a:txBody>
                     <a:bodyPr/>
@@ -12903,14 +13368,14 @@
                         <a:buNone/>
                       </a:pPr>
                       <a:r>
-                        <a:rPr lang="en-US" sz="1100" dirty="0">
+                        <a:rPr lang="en-US" sz="1000" dirty="0">
                           <a:solidFill>
-                            <a:srgbClr val="000000"/>
+                            <a:srgbClr val="404040"/>
                           </a:solidFill>
                         </a:rPr>
                         <a:t>　其中 75～90%</a:t>
                       </a:r>
-                      <a:endParaRPr lang="en-US" sz="1100" dirty="0"/>
+                      <a:endParaRPr lang="en-US" sz="1000" dirty="0"/>
                     </a:p>
                   </a:txBody>
                   <a:tcPr marL="36576" marR="36576" marT="36576" marB="36576" anchor="ctr">
@@ -12964,14 +13429,14 @@
                         <a:buNone/>
                       </a:pPr>
                       <a:r>
-                        <a:rPr lang="en-US" sz="1100" dirty="0">
+                        <a:rPr lang="en-US" sz="1000" dirty="0">
                           <a:solidFill>
-                            <a:srgbClr val="000000"/>
+                            <a:srgbClr val="404040"/>
                           </a:solidFill>
                         </a:rPr>
-                        <a:t>32家</a:t>
+                        <a:t>21家</a:t>
                       </a:r>
-                      <a:endParaRPr lang="en-US" sz="1100" dirty="0"/>
+                      <a:endParaRPr lang="en-US" sz="1000" dirty="0"/>
                     </a:p>
                   </a:txBody>
                   <a:tcPr marL="36576" marR="36576" marT="36576" marB="36576" anchor="ctr">
@@ -13025,14 +13490,14 @@
                         <a:buNone/>
                       </a:pPr>
                       <a:r>
-                        <a:rPr lang="en-US" sz="1100" dirty="0">
+                        <a:rPr lang="en-US" sz="1000" dirty="0">
                           <a:solidFill>
-                            <a:srgbClr val="000000"/>
+                            <a:srgbClr val="404040"/>
                           </a:solidFill>
                         </a:rPr>
-                        <a:t>−3.43億</a:t>
+                        <a:t>+2.00億</a:t>
                       </a:r>
-                      <a:endParaRPr lang="en-US" sz="1100" dirty="0"/>
+                      <a:endParaRPr lang="en-US" sz="1000" dirty="0"/>
                     </a:p>
                   </a:txBody>
                   <a:tcPr marL="36576" marR="36576" marT="36576" marB="36576" anchor="ctr">
@@ -13086,14 +13551,14 @@
                         <a:buNone/>
                       </a:pPr>
                       <a:r>
-                        <a:rPr lang="en-US" sz="1100" dirty="0">
+                        <a:rPr lang="en-US" sz="1000" dirty="0">
                           <a:solidFill>
-                            <a:srgbClr val="000000"/>
+                            <a:srgbClr val="404040"/>
                           </a:solidFill>
                         </a:rPr>
-                        <a:t>42%</a:t>
+                        <a:t>13%</a:t>
                       </a:r>
-                      <a:endParaRPr lang="en-US" sz="1100" dirty="0"/>
+                      <a:endParaRPr lang="en-US" sz="1000" dirty="0"/>
                     </a:p>
                   </a:txBody>
                   <a:tcPr marL="36576" marR="36576" marT="36576" marB="36576" anchor="ctr">
@@ -13139,7 +13604,7 @@
                   </a:tcPr>
                 </a:tc>
               </a:tr>
-              <a:tr h="301752">
+              <a:tr h="228600">
                 <a:tc>
                   <a:txBody>
                     <a:bodyPr/>
@@ -13149,14 +13614,14 @@
                         <a:buNone/>
                       </a:pPr>
                       <a:r>
-                        <a:rPr lang="en-US" sz="1100" dirty="0">
+                        <a:rPr lang="en-US" sz="1000" dirty="0">
                           <a:solidFill>
-                            <a:srgbClr val="000000"/>
+                            <a:srgbClr val="404040"/>
                           </a:solidFill>
                         </a:rPr>
                         <a:t>　其中 未達75%</a:t>
                       </a:r>
-                      <a:endParaRPr lang="en-US" sz="1100" dirty="0"/>
+                      <a:endParaRPr lang="en-US" sz="1000" dirty="0"/>
                     </a:p>
                   </a:txBody>
                   <a:tcPr marL="36576" marR="36576" marT="36576" marB="36576" anchor="ctr">
@@ -13210,14 +13675,14 @@
                         <a:buNone/>
                       </a:pPr>
                       <a:r>
-                        <a:rPr lang="en-US" sz="1100" dirty="0">
+                        <a:rPr lang="en-US" sz="1000" dirty="0">
                           <a:solidFill>
-                            <a:srgbClr val="000000"/>
+                            <a:srgbClr val="404040"/>
                           </a:solidFill>
                         </a:rPr>
-                        <a:t>18家</a:t>
+                        <a:t>6家</a:t>
                       </a:r>
-                      <a:endParaRPr lang="en-US" sz="1100" dirty="0"/>
+                      <a:endParaRPr lang="en-US" sz="1000" dirty="0"/>
                     </a:p>
                   </a:txBody>
                   <a:tcPr marL="36576" marR="36576" marT="36576" marB="36576" anchor="ctr">
@@ -13271,14 +13736,14 @@
                         <a:buNone/>
                       </a:pPr>
                       <a:r>
-                        <a:rPr lang="en-US" sz="1100" dirty="0">
+                        <a:rPr lang="en-US" sz="1000" dirty="0">
                           <a:solidFill>
-                            <a:srgbClr val="000000"/>
+                            <a:srgbClr val="404040"/>
                           </a:solidFill>
                         </a:rPr>
-                        <a:t>−2.18億</a:t>
+                        <a:t>+1.36億</a:t>
                       </a:r>
-                      <a:endParaRPr lang="en-US" sz="1100" dirty="0"/>
+                      <a:endParaRPr lang="en-US" sz="1000" dirty="0"/>
                     </a:p>
                   </a:txBody>
                   <a:tcPr marL="36576" marR="36576" marT="36576" marB="36576" anchor="ctr">
@@ -13332,14 +13797,14 @@
                         <a:buNone/>
                       </a:pPr>
                       <a:r>
-                        <a:rPr lang="en-US" sz="1100" dirty="0">
+                        <a:rPr lang="en-US" sz="1000" dirty="0">
                           <a:solidFill>
-                            <a:srgbClr val="000000"/>
+                            <a:srgbClr val="404040"/>
                           </a:solidFill>
                         </a:rPr>
-                        <a:t>26%</a:t>
+                        <a:t>9%</a:t>
                       </a:r>
-                      <a:endParaRPr lang="en-US" sz="1100" dirty="0"/>
+                      <a:endParaRPr lang="en-US" sz="1000" dirty="0"/>
                     </a:p>
                   </a:txBody>
                   <a:tcPr marL="36576" marR="36576" marT="36576" marB="36576" anchor="ctr">
@@ -13385,7 +13850,7 @@
                   </a:tcPr>
                 </a:tc>
               </a:tr>
-              <a:tr h="301752">
+              <a:tr h="228600">
                 <a:tc>
                   <a:txBody>
                     <a:bodyPr/>
@@ -13395,14 +13860,14 @@
                         <a:buNone/>
                       </a:pPr>
                       <a:r>
-                        <a:rPr lang="en-US" sz="1300" b="1" dirty="0">
+                        <a:rPr lang="en-US" sz="1050" b="1" dirty="0">
                           <a:solidFill>
                             <a:srgbClr val="000000"/>
                           </a:solidFill>
                         </a:rPr>
                         <a:t>合計</a:t>
                       </a:r>
-                      <a:endParaRPr lang="en-US" sz="1300" dirty="0"/>
+                      <a:endParaRPr lang="en-US" sz="1050" dirty="0"/>
                     </a:p>
                   </a:txBody>
                   <a:tcPr marL="36576" marR="36576" marT="36576" marB="36576" anchor="ctr">
@@ -13456,14 +13921,14 @@
                         <a:buNone/>
                       </a:pPr>
                       <a:r>
-                        <a:rPr lang="en-US" sz="1300" b="1" dirty="0">
+                        <a:rPr lang="en-US" sz="1050" b="1" dirty="0">
                           <a:solidFill>
                             <a:srgbClr val="000000"/>
                           </a:solidFill>
                         </a:rPr>
-                        <a:t>84家</a:t>
+                        <a:t>99家</a:t>
                       </a:r>
-                      <a:endParaRPr lang="en-US" sz="1300" dirty="0"/>
+                      <a:endParaRPr lang="en-US" sz="1050" dirty="0"/>
                     </a:p>
                   </a:txBody>
                   <a:tcPr marL="36576" marR="36576" marT="36576" marB="36576" anchor="ctr">
@@ -13517,14 +13982,14 @@
                         <a:buNone/>
                       </a:pPr>
                       <a:r>
-                        <a:rPr lang="en-US" sz="1300" b="1" dirty="0">
+                        <a:rPr lang="en-US" sz="1050" b="1" dirty="0">
                           <a:solidFill>
                             <a:srgbClr val="000000"/>
                           </a:solidFill>
                         </a:rPr>
-                        <a:t>−8.23億</a:t>
+                        <a:t>+15.23億</a:t>
                       </a:r>
-                      <a:endParaRPr lang="en-US" sz="1300" dirty="0"/>
+                      <a:endParaRPr lang="en-US" sz="1050" dirty="0"/>
                     </a:p>
                   </a:txBody>
                   <a:tcPr marL="36576" marR="36576" marT="36576" marB="36576" anchor="ctr">
@@ -13578,14 +14043,14 @@
                         <a:buNone/>
                       </a:pPr>
                       <a:r>
-                        <a:rPr lang="en-US" sz="1300" b="1" dirty="0">
+                        <a:rPr lang="en-US" sz="1050" b="1" dirty="0">
                           <a:solidFill>
                             <a:srgbClr val="000000"/>
                           </a:solidFill>
                         </a:rPr>
                         <a:t>100%</a:t>
                       </a:r>
-                      <a:endParaRPr lang="en-US" sz="1300" dirty="0"/>
+                      <a:endParaRPr lang="en-US" sz="1050" dirty="0"/>
                     </a:p>
                   </a:txBody>
                   <a:tcPr marL="36576" marR="36576" marT="36576" marB="36576" anchor="ctr">
@@ -13637,77 +14102,1812 @@
       </p:graphicFrame>
       <p:sp>
         <p:nvSpPr>
-          <p:cNvPr id="24" name="Text 21"/>
+          <p:cNvPr id="23" name="chip gap"/>
           <p:cNvSpPr txBox="1"/>
           <p:nvPr/>
         </p:nvSpPr>
         <p:spPr>
           <a:xfrm>
-            <a:off x="7086600" y="4709160"/>
-            <a:ext cx="4526280" cy="1325880"/>
+            <a:off x="7086600" y="4041648"/>
+            <a:ext cx="2377440" cy="292608"/>
           </a:xfrm>
-          <a:prstGeom prst="rect">
-            <a:avLst/>
+          <a:prstGeom prst="roundRect">
+            <a:avLst>
+              <a:gd name="adj" fmla="val 25000"/>
+            </a:avLst>
           </a:prstGeom>
-          <a:noFill/>
+          <a:solidFill>
+            <a:srgbClr val="960A14"/>
+          </a:solidFill>
           <a:ln/>
         </p:spPr>
         <p:txBody>
-          <a:bodyPr wrap="square" lIns="381" tIns="381" rIns="381" bIns="381" rtlCol="0" anchor="t"/>
+          <a:bodyPr wrap="square" lIns="0" tIns="0" rIns="0" bIns="0" rtlCol="0" anchor="ctr"/>
           <a:lstStyle/>
           <a:p>
-            <a:pPr indent="0" marL="0">
-              <a:spcAft>
-                <a:spcPts val="300"/>
-              </a:spcAft>
+            <a:pPr algn="ctr" indent="0" marL="0">
               <a:buNone/>
             </a:pPr>
             <a:r>
-              <a:rPr lang="en-US" sz="1050" dirty="0">
+              <a:rPr lang="en-US" sz="1200" b="1" dirty="0">
                 <a:solidFill>
-                  <a:srgbClr val="000000"/>
+                  <a:srgbClr val="FFFFFF"/>
                 </a:solidFill>
               </a:rPr>
-              <a:t>114年未達標群113家中，115年有66家再次未達成、缺口 7.1億，占全行缺口 86%；其餘47家超額 6.2億。</a:t>
+              <a:t>缺口 8.23億 來自誰</a:t>
             </a:r>
-            <a:endParaRPr lang="en-US" sz="1050" dirty="0"/>
-          </a:p>
-          <a:p>
-            <a:pPr indent="0" marL="0">
-              <a:spcAft>
-                <a:spcPts val="300"/>
-              </a:spcAft>
-              <a:buNone/>
-            </a:pPr>
-            <a:r>
-              <a:rPr lang="en-US" sz="1050" dirty="0">
-                <a:solidFill>
-                  <a:srgbClr val="000000"/>
-                </a:solidFill>
-              </a:rPr>
-              <a:t>這些缺口由 99 家超額分行（多為績優分行）的 15.2億 填補，全行仍達成 105.9%，使結構問題在總數中被掩蓋。</a:t>
-            </a:r>
-            <a:endParaRPr lang="en-US" sz="1050" dirty="0"/>
-          </a:p>
-          <a:p>
-            <a:pPr indent="0" marL="0">
-              <a:spcAft>
-                <a:spcPts val="300"/>
-              </a:spcAft>
-              <a:buNone/>
-            </a:pPr>
-            <a:r>
-              <a:rPr lang="en-US" sz="1050" b="1" dirty="0">
-                <a:solidFill>
-                  <a:srgbClr val="C00000"/>
-                </a:solidFill>
-              </a:rPr>
-              <a:t>目標加成並未換來實績，只是把缺口轉嫁到其他分行。</a:t>
-            </a:r>
-            <a:endParaRPr lang="en-US" sz="1050" dirty="0"/>
+            <a:endParaRPr lang="en-US" sz="1200" dirty="0"/>
           </a:p>
         </p:txBody>
       </p:sp>
+      <p:graphicFrame>
+        <p:nvGraphicFramePr>
+          <p:cNvPr id="9" name="Table 1"/>
+          <p:cNvGraphicFramePr>
+            <a:graphicFrameLocks noGrp="1"/>
+          </p:cNvGraphicFramePr>
+          <p:nvPr>
+            <p:extLst>
+              <p:ext uri="{D42A27DB-BD31-4B8C-83A1-F6EECF244321}">
+                <p14:modId xmlns:p14="http://schemas.microsoft.com/office/powerpoint/2010/main" val="1579011935"/>
+              </p:ext>
+            </p:extLst>
+          </p:nvPr>
+        </p:nvGraphicFramePr>
+        <p:xfrm>
+          <a:off x="7086600" y="4370832"/>
+          <a:ext cx="4526280" cy="914400"/>
+        </p:xfrm>
+        <a:graphic>
+          <a:graphicData uri="http://schemas.openxmlformats.org/drawingml/2006/table">
+            <a:tbl>
+              <a:tblPr/>
+              <a:tblGrid>
+                <a:gridCol w="1737360"/>
+                <a:gridCol w="914400"/>
+                <a:gridCol w="1005840"/>
+                <a:gridCol w="868680"/>
+              </a:tblGrid>
+              <a:tr h="228600">
+                <a:tc>
+                  <a:txBody>
+                    <a:bodyPr/>
+                    <a:lstStyle/>
+                    <a:p>
+                      <a:pPr algn="ctr" indent="0" marL="0">
+                        <a:buNone/>
+                      </a:pPr>
+                      <a:r>
+                        <a:rPr lang="en-US" sz="1100" b="1" dirty="0">
+                          <a:solidFill>
+                            <a:srgbClr val="FFFFFF"/>
+                          </a:solidFill>
+                        </a:rPr>
+                        <a:t>114年分群</a:t>
+                      </a:r>
+                      <a:endParaRPr lang="en-US" sz="1100" dirty="0"/>
+                    </a:p>
+                  </a:txBody>
+                  <a:tcPr marL="36576" marR="36576" marT="36576" marB="36576" anchor="ctr">
+                    <a:lnL w="9525" cap="flat" cmpd="sng" algn="ctr">
+                      <a:solidFill>
+                        <a:srgbClr val="FFFFFF"/>
+                      </a:solidFill>
+                      <a:prstDash val="solid"/>
+                      <a:round/>
+                      <a:headEnd type="none" w="med" len="med"/>
+                      <a:tailEnd type="none" w="med" len="med"/>
+                    </a:lnL>
+                    <a:lnR w="9525" cap="flat" cmpd="sng" algn="ctr">
+                      <a:solidFill>
+                        <a:srgbClr val="FFFFFF"/>
+                      </a:solidFill>
+                      <a:prstDash val="solid"/>
+                      <a:round/>
+                      <a:headEnd type="none" w="med" len="med"/>
+                      <a:tailEnd type="none" w="med" len="med"/>
+                    </a:lnR>
+                    <a:lnT w="9525" cap="flat" cmpd="sng" algn="ctr">
+                      <a:solidFill>
+                        <a:srgbClr val="FFFFFF"/>
+                      </a:solidFill>
+                      <a:prstDash val="solid"/>
+                      <a:round/>
+                      <a:headEnd type="none" w="med" len="med"/>
+                      <a:tailEnd type="none" w="med" len="med"/>
+                    </a:lnT>
+                    <a:lnB w="9525" cap="flat" cmpd="sng" algn="ctr">
+                      <a:solidFill>
+                        <a:srgbClr val="FFFFFF"/>
+                      </a:solidFill>
+                      <a:prstDash val="solid"/>
+                      <a:round/>
+                      <a:headEnd type="none" w="med" len="med"/>
+                      <a:tailEnd type="none" w="med" len="med"/>
+                    </a:lnB>
+                    <a:solidFill>
+                      <a:srgbClr val="960A14"/>
+                    </a:solidFill>
+                  </a:tcPr>
+                </a:tc>
+                <a:tc>
+                  <a:txBody>
+                    <a:bodyPr/>
+                    <a:lstStyle/>
+                    <a:p>
+                      <a:pPr algn="ctr" indent="0" marL="0">
+                        <a:buNone/>
+                      </a:pPr>
+                      <a:r>
+                        <a:rPr lang="en-US" sz="950" b="1" dirty="0">
+                          <a:solidFill>
+                            <a:srgbClr val="FFFFFF"/>
+                          </a:solidFill>
+                        </a:rPr>
+                        <a:t>115年</a:t>
+                      </a:r>
+                      <a:endParaRPr lang="en-US" sz="950" dirty="0"/>
+                    </a:p>
+                    <a:p>
+                      <a:pPr algn="ctr" indent="0" marL="0">
+                        <a:buNone/>
+                      </a:pPr>
+                      <a:r>
+                        <a:rPr lang="en-US" sz="950" b="1" dirty="0">
+                          <a:solidFill>
+                            <a:srgbClr val="FFFFFF"/>
+                          </a:solidFill>
+                        </a:rPr>
+                        <a:t>未達成家數</a:t>
+                      </a:r>
+                      <a:endParaRPr lang="en-US" sz="950" dirty="0"/>
+                    </a:p>
+                  </a:txBody>
+                  <a:tcPr marL="36576" marR="36576" marT="36576" marB="36576" anchor="ctr">
+                    <a:lnL w="9525" cap="flat" cmpd="sng" algn="ctr">
+                      <a:solidFill>
+                        <a:srgbClr val="FFFFFF"/>
+                      </a:solidFill>
+                      <a:prstDash val="solid"/>
+                      <a:round/>
+                      <a:headEnd type="none" w="med" len="med"/>
+                      <a:tailEnd type="none" w="med" len="med"/>
+                    </a:lnL>
+                    <a:lnR w="9525" cap="flat" cmpd="sng" algn="ctr">
+                      <a:solidFill>
+                        <a:srgbClr val="FFFFFF"/>
+                      </a:solidFill>
+                      <a:prstDash val="solid"/>
+                      <a:round/>
+                      <a:headEnd type="none" w="med" len="med"/>
+                      <a:tailEnd type="none" w="med" len="med"/>
+                    </a:lnR>
+                    <a:lnT w="9525" cap="flat" cmpd="sng" algn="ctr">
+                      <a:solidFill>
+                        <a:srgbClr val="FFFFFF"/>
+                      </a:solidFill>
+                      <a:prstDash val="solid"/>
+                      <a:round/>
+                      <a:headEnd type="none" w="med" len="med"/>
+                      <a:tailEnd type="none" w="med" len="med"/>
+                    </a:lnT>
+                    <a:lnB w="9525" cap="flat" cmpd="sng" algn="ctr">
+                      <a:solidFill>
+                        <a:srgbClr val="FFFFFF"/>
+                      </a:solidFill>
+                      <a:prstDash val="solid"/>
+                      <a:round/>
+                      <a:headEnd type="none" w="med" len="med"/>
+                      <a:tailEnd type="none" w="med" len="med"/>
+                    </a:lnB>
+                    <a:solidFill>
+                      <a:srgbClr val="960A14"/>
+                    </a:solidFill>
+                  </a:tcPr>
+                </a:tc>
+                <a:tc>
+                  <a:txBody>
+                    <a:bodyPr/>
+                    <a:lstStyle/>
+                    <a:p>
+                      <a:pPr algn="ctr" indent="0" marL="0">
+                        <a:buNone/>
+                      </a:pPr>
+                      <a:r>
+                        <a:rPr lang="en-US" sz="1100" b="1" dirty="0">
+                          <a:solidFill>
+                            <a:srgbClr val="FFFFFF"/>
+                          </a:solidFill>
+                        </a:rPr>
+                        <a:t>未達成缺口</a:t>
+                      </a:r>
+                      <a:endParaRPr lang="en-US" sz="1100" dirty="0"/>
+                    </a:p>
+                  </a:txBody>
+                  <a:tcPr marL="36576" marR="36576" marT="36576" marB="36576" anchor="ctr">
+                    <a:lnL w="9525" cap="flat" cmpd="sng" algn="ctr">
+                      <a:solidFill>
+                        <a:srgbClr val="FFFFFF"/>
+                      </a:solidFill>
+                      <a:prstDash val="solid"/>
+                      <a:round/>
+                      <a:headEnd type="none" w="med" len="med"/>
+                      <a:tailEnd type="none" w="med" len="med"/>
+                    </a:lnL>
+                    <a:lnR w="9525" cap="flat" cmpd="sng" algn="ctr">
+                      <a:solidFill>
+                        <a:srgbClr val="FFFFFF"/>
+                      </a:solidFill>
+                      <a:prstDash val="solid"/>
+                      <a:round/>
+                      <a:headEnd type="none" w="med" len="med"/>
+                      <a:tailEnd type="none" w="med" len="med"/>
+                    </a:lnR>
+                    <a:lnT w="9525" cap="flat" cmpd="sng" algn="ctr">
+                      <a:solidFill>
+                        <a:srgbClr val="FFFFFF"/>
+                      </a:solidFill>
+                      <a:prstDash val="solid"/>
+                      <a:round/>
+                      <a:headEnd type="none" w="med" len="med"/>
+                      <a:tailEnd type="none" w="med" len="med"/>
+                    </a:lnT>
+                    <a:lnB w="9525" cap="flat" cmpd="sng" algn="ctr">
+                      <a:solidFill>
+                        <a:srgbClr val="FFFFFF"/>
+                      </a:solidFill>
+                      <a:prstDash val="solid"/>
+                      <a:round/>
+                      <a:headEnd type="none" w="med" len="med"/>
+                      <a:tailEnd type="none" w="med" len="med"/>
+                    </a:lnB>
+                    <a:solidFill>
+                      <a:srgbClr val="960A14"/>
+                    </a:solidFill>
+                  </a:tcPr>
+                </a:tc>
+                <a:tc>
+                  <a:txBody>
+                    <a:bodyPr/>
+                    <a:lstStyle/>
+                    <a:p>
+                      <a:pPr algn="ctr" indent="0" marL="0">
+                        <a:buNone/>
+                      </a:pPr>
+                      <a:r>
+                        <a:rPr lang="en-US" sz="1100" b="1" dirty="0">
+                          <a:solidFill>
+                            <a:srgbClr val="FFFFFF"/>
+                          </a:solidFill>
+                        </a:rPr>
+                        <a:t>占比</a:t>
+                      </a:r>
+                      <a:endParaRPr lang="en-US" sz="1100" dirty="0"/>
+                    </a:p>
+                  </a:txBody>
+                  <a:tcPr marL="36576" marR="36576" marT="36576" marB="36576" anchor="ctr">
+                    <a:lnL w="9525" cap="flat" cmpd="sng" algn="ctr">
+                      <a:solidFill>
+                        <a:srgbClr val="FFFFFF"/>
+                      </a:solidFill>
+                      <a:prstDash val="solid"/>
+                      <a:round/>
+                      <a:headEnd type="none" w="med" len="med"/>
+                      <a:tailEnd type="none" w="med" len="med"/>
+                    </a:lnL>
+                    <a:lnR w="9525" cap="flat" cmpd="sng" algn="ctr">
+                      <a:solidFill>
+                        <a:srgbClr val="FFFFFF"/>
+                      </a:solidFill>
+                      <a:prstDash val="solid"/>
+                      <a:round/>
+                      <a:headEnd type="none" w="med" len="med"/>
+                      <a:tailEnd type="none" w="med" len="med"/>
+                    </a:lnR>
+                    <a:lnT w="9525" cap="flat" cmpd="sng" algn="ctr">
+                      <a:solidFill>
+                        <a:srgbClr val="FFFFFF"/>
+                      </a:solidFill>
+                      <a:prstDash val="solid"/>
+                      <a:round/>
+                      <a:headEnd type="none" w="med" len="med"/>
+                      <a:tailEnd type="none" w="med" len="med"/>
+                    </a:lnT>
+                    <a:lnB w="9525" cap="flat" cmpd="sng" algn="ctr">
+                      <a:solidFill>
+                        <a:srgbClr val="FFFFFF"/>
+                      </a:solidFill>
+                      <a:prstDash val="solid"/>
+                      <a:round/>
+                      <a:headEnd type="none" w="med" len="med"/>
+                      <a:tailEnd type="none" w="med" len="med"/>
+                    </a:lnB>
+                    <a:solidFill>
+                      <a:srgbClr val="960A14"/>
+                    </a:solidFill>
+                  </a:tcPr>
+                </a:tc>
+              </a:tr>
+              <a:tr h="228600">
+                <a:tc>
+                  <a:txBody>
+                    <a:bodyPr/>
+                    <a:lstStyle/>
+                    <a:p>
+                      <a:pPr algn="ctr" indent="0" marL="0">
+                        <a:buNone/>
+                      </a:pPr>
+                      <a:r>
+                        <a:rPr lang="en-US" sz="1050" dirty="0">
+                          <a:solidFill>
+                            <a:srgbClr val="000000"/>
+                          </a:solidFill>
+                        </a:rPr>
+                        <a:t>達標群（≥100%）</a:t>
+                      </a:r>
+                      <a:endParaRPr lang="en-US" sz="1050" dirty="0"/>
+                    </a:p>
+                  </a:txBody>
+                  <a:tcPr marL="36576" marR="36576" marT="36576" marB="36576" anchor="ctr">
+                    <a:lnL w="9525" cap="flat" cmpd="sng" algn="ctr">
+                      <a:solidFill>
+                        <a:srgbClr val="FFFFFF"/>
+                      </a:solidFill>
+                      <a:prstDash val="solid"/>
+                      <a:round/>
+                      <a:headEnd type="none" w="med" len="med"/>
+                      <a:tailEnd type="none" w="med" len="med"/>
+                    </a:lnL>
+                    <a:lnR w="9525" cap="flat" cmpd="sng" algn="ctr">
+                      <a:solidFill>
+                        <a:srgbClr val="FFFFFF"/>
+                      </a:solidFill>
+                      <a:prstDash val="solid"/>
+                      <a:round/>
+                      <a:headEnd type="none" w="med" len="med"/>
+                      <a:tailEnd type="none" w="med" len="med"/>
+                    </a:lnR>
+                    <a:lnT w="9525" cap="flat" cmpd="sng" algn="ctr">
+                      <a:solidFill>
+                        <a:srgbClr val="FFFFFF"/>
+                      </a:solidFill>
+                      <a:prstDash val="solid"/>
+                      <a:round/>
+                      <a:headEnd type="none" w="med" len="med"/>
+                      <a:tailEnd type="none" w="med" len="med"/>
+                    </a:lnT>
+                    <a:lnB w="9525" cap="flat" cmpd="sng" algn="ctr">
+                      <a:solidFill>
+                        <a:srgbClr val="FFFFFF"/>
+                      </a:solidFill>
+                      <a:prstDash val="solid"/>
+                      <a:round/>
+                      <a:headEnd type="none" w="med" len="med"/>
+                      <a:tailEnd type="none" w="med" len="med"/>
+                    </a:lnB>
+                    <a:solidFill>
+                      <a:srgbClr val="FFFFFF"/>
+                    </a:solidFill>
+                  </a:tcPr>
+                </a:tc>
+                <a:tc>
+                  <a:txBody>
+                    <a:bodyPr/>
+                    <a:lstStyle/>
+                    <a:p>
+                      <a:pPr algn="ctr" indent="0" marL="0">
+                        <a:buNone/>
+                      </a:pPr>
+                      <a:r>
+                        <a:rPr lang="en-US" sz="1050" dirty="0">
+                          <a:solidFill>
+                            <a:srgbClr val="000000"/>
+                          </a:solidFill>
+                        </a:rPr>
+                        <a:t>18家</a:t>
+                      </a:r>
+                      <a:endParaRPr lang="en-US" sz="1050" dirty="0"/>
+                    </a:p>
+                  </a:txBody>
+                  <a:tcPr marL="36576" marR="36576" marT="36576" marB="36576" anchor="ctr">
+                    <a:lnL w="9525" cap="flat" cmpd="sng" algn="ctr">
+                      <a:solidFill>
+                        <a:srgbClr val="FFFFFF"/>
+                      </a:solidFill>
+                      <a:prstDash val="solid"/>
+                      <a:round/>
+                      <a:headEnd type="none" w="med" len="med"/>
+                      <a:tailEnd type="none" w="med" len="med"/>
+                    </a:lnL>
+                    <a:lnR w="9525" cap="flat" cmpd="sng" algn="ctr">
+                      <a:solidFill>
+                        <a:srgbClr val="FFFFFF"/>
+                      </a:solidFill>
+                      <a:prstDash val="solid"/>
+                      <a:round/>
+                      <a:headEnd type="none" w="med" len="med"/>
+                      <a:tailEnd type="none" w="med" len="med"/>
+                    </a:lnR>
+                    <a:lnT w="9525" cap="flat" cmpd="sng" algn="ctr">
+                      <a:solidFill>
+                        <a:srgbClr val="FFFFFF"/>
+                      </a:solidFill>
+                      <a:prstDash val="solid"/>
+                      <a:round/>
+                      <a:headEnd type="none" w="med" len="med"/>
+                      <a:tailEnd type="none" w="med" len="med"/>
+                    </a:lnT>
+                    <a:lnB w="9525" cap="flat" cmpd="sng" algn="ctr">
+                      <a:solidFill>
+                        <a:srgbClr val="FFFFFF"/>
+                      </a:solidFill>
+                      <a:prstDash val="solid"/>
+                      <a:round/>
+                      <a:headEnd type="none" w="med" len="med"/>
+                      <a:tailEnd type="none" w="med" len="med"/>
+                    </a:lnB>
+                    <a:solidFill>
+                      <a:srgbClr val="FFFFFF"/>
+                    </a:solidFill>
+                  </a:tcPr>
+                </a:tc>
+                <a:tc>
+                  <a:txBody>
+                    <a:bodyPr/>
+                    <a:lstStyle/>
+                    <a:p>
+                      <a:pPr algn="ctr" indent="0" marL="0">
+                        <a:buNone/>
+                      </a:pPr>
+                      <a:r>
+                        <a:rPr lang="en-US" sz="1050" dirty="0">
+                          <a:solidFill>
+                            <a:srgbClr val="000000"/>
+                          </a:solidFill>
+                        </a:rPr>
+                        <a:t>−1.13億</a:t>
+                      </a:r>
+                      <a:endParaRPr lang="en-US" sz="1050" dirty="0"/>
+                    </a:p>
+                  </a:txBody>
+                  <a:tcPr marL="36576" marR="36576" marT="36576" marB="36576" anchor="ctr">
+                    <a:lnL w="9525" cap="flat" cmpd="sng" algn="ctr">
+                      <a:solidFill>
+                        <a:srgbClr val="FFFFFF"/>
+                      </a:solidFill>
+                      <a:prstDash val="solid"/>
+                      <a:round/>
+                      <a:headEnd type="none" w="med" len="med"/>
+                      <a:tailEnd type="none" w="med" len="med"/>
+                    </a:lnL>
+                    <a:lnR w="9525" cap="flat" cmpd="sng" algn="ctr">
+                      <a:solidFill>
+                        <a:srgbClr val="FFFFFF"/>
+                      </a:solidFill>
+                      <a:prstDash val="solid"/>
+                      <a:round/>
+                      <a:headEnd type="none" w="med" len="med"/>
+                      <a:tailEnd type="none" w="med" len="med"/>
+                    </a:lnR>
+                    <a:lnT w="9525" cap="flat" cmpd="sng" algn="ctr">
+                      <a:solidFill>
+                        <a:srgbClr val="FFFFFF"/>
+                      </a:solidFill>
+                      <a:prstDash val="solid"/>
+                      <a:round/>
+                      <a:headEnd type="none" w="med" len="med"/>
+                      <a:tailEnd type="none" w="med" len="med"/>
+                    </a:lnT>
+                    <a:lnB w="9525" cap="flat" cmpd="sng" algn="ctr">
+                      <a:solidFill>
+                        <a:srgbClr val="FFFFFF"/>
+                      </a:solidFill>
+                      <a:prstDash val="solid"/>
+                      <a:round/>
+                      <a:headEnd type="none" w="med" len="med"/>
+                      <a:tailEnd type="none" w="med" len="med"/>
+                    </a:lnB>
+                    <a:solidFill>
+                      <a:srgbClr val="FFFFFF"/>
+                    </a:solidFill>
+                  </a:tcPr>
+                </a:tc>
+                <a:tc>
+                  <a:txBody>
+                    <a:bodyPr/>
+                    <a:lstStyle/>
+                    <a:p>
+                      <a:pPr algn="ctr" indent="0" marL="0">
+                        <a:buNone/>
+                      </a:pPr>
+                      <a:r>
+                        <a:rPr lang="en-US" sz="1050" dirty="0">
+                          <a:solidFill>
+                            <a:srgbClr val="000000"/>
+                          </a:solidFill>
+                        </a:rPr>
+                        <a:t>14%</a:t>
+                      </a:r>
+                      <a:endParaRPr lang="en-US" sz="1050" dirty="0"/>
+                    </a:p>
+                  </a:txBody>
+                  <a:tcPr marL="36576" marR="36576" marT="36576" marB="36576" anchor="ctr">
+                    <a:lnL w="9525" cap="flat" cmpd="sng" algn="ctr">
+                      <a:solidFill>
+                        <a:srgbClr val="FFFFFF"/>
+                      </a:solidFill>
+                      <a:prstDash val="solid"/>
+                      <a:round/>
+                      <a:headEnd type="none" w="med" len="med"/>
+                      <a:tailEnd type="none" w="med" len="med"/>
+                    </a:lnL>
+                    <a:lnR w="9525" cap="flat" cmpd="sng" algn="ctr">
+                      <a:solidFill>
+                        <a:srgbClr val="FFFFFF"/>
+                      </a:solidFill>
+                      <a:prstDash val="solid"/>
+                      <a:round/>
+                      <a:headEnd type="none" w="med" len="med"/>
+                      <a:tailEnd type="none" w="med" len="med"/>
+                    </a:lnR>
+                    <a:lnT w="9525" cap="flat" cmpd="sng" algn="ctr">
+                      <a:solidFill>
+                        <a:srgbClr val="FFFFFF"/>
+                      </a:solidFill>
+                      <a:prstDash val="solid"/>
+                      <a:round/>
+                      <a:headEnd type="none" w="med" len="med"/>
+                      <a:tailEnd type="none" w="med" len="med"/>
+                    </a:lnT>
+                    <a:lnB w="9525" cap="flat" cmpd="sng" algn="ctr">
+                      <a:solidFill>
+                        <a:srgbClr val="FFFFFF"/>
+                      </a:solidFill>
+                      <a:prstDash val="solid"/>
+                      <a:round/>
+                      <a:headEnd type="none" w="med" len="med"/>
+                      <a:tailEnd type="none" w="med" len="med"/>
+                    </a:lnB>
+                    <a:solidFill>
+                      <a:srgbClr val="FFFFFF"/>
+                    </a:solidFill>
+                  </a:tcPr>
+                </a:tc>
+              </a:tr>
+              <a:tr h="228600">
+                <a:tc>
+                  <a:txBody>
+                    <a:bodyPr/>
+                    <a:lstStyle/>
+                    <a:p>
+                      <a:pPr algn="ctr" indent="0" marL="0">
+                        <a:buNone/>
+                      </a:pPr>
+                      <a:r>
+                        <a:rPr lang="en-US" sz="1050" b="1" dirty="0">
+                          <a:solidFill>
+                            <a:srgbClr val="C00000"/>
+                          </a:solidFill>
+                        </a:rPr>
+                        <a:t>未達標群（&lt;100%）</a:t>
+                      </a:r>
+                      <a:endParaRPr lang="en-US" sz="1050" dirty="0"/>
+                    </a:p>
+                  </a:txBody>
+                  <a:tcPr marL="36576" marR="36576" marT="36576" marB="36576" anchor="ctr">
+                    <a:lnL w="9525" cap="flat" cmpd="sng" algn="ctr">
+                      <a:solidFill>
+                        <a:srgbClr val="FFFFFF"/>
+                      </a:solidFill>
+                      <a:prstDash val="solid"/>
+                      <a:round/>
+                      <a:headEnd type="none" w="med" len="med"/>
+                      <a:tailEnd type="none" w="med" len="med"/>
+                    </a:lnL>
+                    <a:lnR w="9525" cap="flat" cmpd="sng" algn="ctr">
+                      <a:solidFill>
+                        <a:srgbClr val="FFFFFF"/>
+                      </a:solidFill>
+                      <a:prstDash val="solid"/>
+                      <a:round/>
+                      <a:headEnd type="none" w="med" len="med"/>
+                      <a:tailEnd type="none" w="med" len="med"/>
+                    </a:lnR>
+                    <a:lnT w="9525" cap="flat" cmpd="sng" algn="ctr">
+                      <a:solidFill>
+                        <a:srgbClr val="FFFFFF"/>
+                      </a:solidFill>
+                      <a:prstDash val="solid"/>
+                      <a:round/>
+                      <a:headEnd type="none" w="med" len="med"/>
+                      <a:tailEnd type="none" w="med" len="med"/>
+                    </a:lnT>
+                    <a:lnB w="9525" cap="flat" cmpd="sng" algn="ctr">
+                      <a:solidFill>
+                        <a:srgbClr val="FFFFFF"/>
+                      </a:solidFill>
+                      <a:prstDash val="solid"/>
+                      <a:round/>
+                      <a:headEnd type="none" w="med" len="med"/>
+                      <a:tailEnd type="none" w="med" len="med"/>
+                    </a:lnB>
+                    <a:solidFill>
+                      <a:srgbClr val="FDF1E9"/>
+                    </a:solidFill>
+                  </a:tcPr>
+                </a:tc>
+                <a:tc>
+                  <a:txBody>
+                    <a:bodyPr/>
+                    <a:lstStyle/>
+                    <a:p>
+                      <a:pPr algn="ctr" indent="0" marL="0">
+                        <a:buNone/>
+                      </a:pPr>
+                      <a:r>
+                        <a:rPr lang="en-US" sz="1050" b="1" dirty="0">
+                          <a:solidFill>
+                            <a:srgbClr val="C00000"/>
+                          </a:solidFill>
+                        </a:rPr>
+                        <a:t>66家</a:t>
+                      </a:r>
+                      <a:endParaRPr lang="en-US" sz="1050" dirty="0"/>
+                    </a:p>
+                  </a:txBody>
+                  <a:tcPr marL="36576" marR="36576" marT="36576" marB="36576" anchor="ctr">
+                    <a:lnL w="9525" cap="flat" cmpd="sng" algn="ctr">
+                      <a:solidFill>
+                        <a:srgbClr val="FFFFFF"/>
+                      </a:solidFill>
+                      <a:prstDash val="solid"/>
+                      <a:round/>
+                      <a:headEnd type="none" w="med" len="med"/>
+                      <a:tailEnd type="none" w="med" len="med"/>
+                    </a:lnL>
+                    <a:lnR w="9525" cap="flat" cmpd="sng" algn="ctr">
+                      <a:solidFill>
+                        <a:srgbClr val="FFFFFF"/>
+                      </a:solidFill>
+                      <a:prstDash val="solid"/>
+                      <a:round/>
+                      <a:headEnd type="none" w="med" len="med"/>
+                      <a:tailEnd type="none" w="med" len="med"/>
+                    </a:lnR>
+                    <a:lnT w="9525" cap="flat" cmpd="sng" algn="ctr">
+                      <a:solidFill>
+                        <a:srgbClr val="FFFFFF"/>
+                      </a:solidFill>
+                      <a:prstDash val="solid"/>
+                      <a:round/>
+                      <a:headEnd type="none" w="med" len="med"/>
+                      <a:tailEnd type="none" w="med" len="med"/>
+                    </a:lnT>
+                    <a:lnB w="9525" cap="flat" cmpd="sng" algn="ctr">
+                      <a:solidFill>
+                        <a:srgbClr val="FFFFFF"/>
+                      </a:solidFill>
+                      <a:prstDash val="solid"/>
+                      <a:round/>
+                      <a:headEnd type="none" w="med" len="med"/>
+                      <a:tailEnd type="none" w="med" len="med"/>
+                    </a:lnB>
+                    <a:solidFill>
+                      <a:srgbClr val="FDF1E9"/>
+                    </a:solidFill>
+                  </a:tcPr>
+                </a:tc>
+                <a:tc>
+                  <a:txBody>
+                    <a:bodyPr/>
+                    <a:lstStyle/>
+                    <a:p>
+                      <a:pPr algn="ctr" indent="0" marL="0">
+                        <a:buNone/>
+                      </a:pPr>
+                      <a:r>
+                        <a:rPr lang="en-US" sz="1050" b="1" dirty="0">
+                          <a:solidFill>
+                            <a:srgbClr val="C00000"/>
+                          </a:solidFill>
+                        </a:rPr>
+                        <a:t>−7.10億</a:t>
+                      </a:r>
+                      <a:endParaRPr lang="en-US" sz="1050" dirty="0"/>
+                    </a:p>
+                  </a:txBody>
+                  <a:tcPr marL="36576" marR="36576" marT="36576" marB="36576" anchor="ctr">
+                    <a:lnL w="9525" cap="flat" cmpd="sng" algn="ctr">
+                      <a:solidFill>
+                        <a:srgbClr val="FFFFFF"/>
+                      </a:solidFill>
+                      <a:prstDash val="solid"/>
+                      <a:round/>
+                      <a:headEnd type="none" w="med" len="med"/>
+                      <a:tailEnd type="none" w="med" len="med"/>
+                    </a:lnL>
+                    <a:lnR w="9525" cap="flat" cmpd="sng" algn="ctr">
+                      <a:solidFill>
+                        <a:srgbClr val="FFFFFF"/>
+                      </a:solidFill>
+                      <a:prstDash val="solid"/>
+                      <a:round/>
+                      <a:headEnd type="none" w="med" len="med"/>
+                      <a:tailEnd type="none" w="med" len="med"/>
+                    </a:lnR>
+                    <a:lnT w="9525" cap="flat" cmpd="sng" algn="ctr">
+                      <a:solidFill>
+                        <a:srgbClr val="FFFFFF"/>
+                      </a:solidFill>
+                      <a:prstDash val="solid"/>
+                      <a:round/>
+                      <a:headEnd type="none" w="med" len="med"/>
+                      <a:tailEnd type="none" w="med" len="med"/>
+                    </a:lnT>
+                    <a:lnB w="9525" cap="flat" cmpd="sng" algn="ctr">
+                      <a:solidFill>
+                        <a:srgbClr val="FFFFFF"/>
+                      </a:solidFill>
+                      <a:prstDash val="solid"/>
+                      <a:round/>
+                      <a:headEnd type="none" w="med" len="med"/>
+                      <a:tailEnd type="none" w="med" len="med"/>
+                    </a:lnB>
+                    <a:solidFill>
+                      <a:srgbClr val="FDF1E9"/>
+                    </a:solidFill>
+                  </a:tcPr>
+                </a:tc>
+                <a:tc>
+                  <a:txBody>
+                    <a:bodyPr/>
+                    <a:lstStyle/>
+                    <a:p>
+                      <a:pPr algn="ctr" indent="0" marL="0">
+                        <a:buNone/>
+                      </a:pPr>
+                      <a:r>
+                        <a:rPr lang="en-US" sz="1050" b="1" dirty="0">
+                          <a:solidFill>
+                            <a:srgbClr val="C00000"/>
+                          </a:solidFill>
+                        </a:rPr>
+                        <a:t>86%</a:t>
+                      </a:r>
+                      <a:endParaRPr lang="en-US" sz="1050" dirty="0"/>
+                    </a:p>
+                  </a:txBody>
+                  <a:tcPr marL="36576" marR="36576" marT="36576" marB="36576" anchor="ctr">
+                    <a:lnL w="9525" cap="flat" cmpd="sng" algn="ctr">
+                      <a:solidFill>
+                        <a:srgbClr val="FFFFFF"/>
+                      </a:solidFill>
+                      <a:prstDash val="solid"/>
+                      <a:round/>
+                      <a:headEnd type="none" w="med" len="med"/>
+                      <a:tailEnd type="none" w="med" len="med"/>
+                    </a:lnL>
+                    <a:lnR w="9525" cap="flat" cmpd="sng" algn="ctr">
+                      <a:solidFill>
+                        <a:srgbClr val="FFFFFF"/>
+                      </a:solidFill>
+                      <a:prstDash val="solid"/>
+                      <a:round/>
+                      <a:headEnd type="none" w="med" len="med"/>
+                      <a:tailEnd type="none" w="med" len="med"/>
+                    </a:lnR>
+                    <a:lnT w="9525" cap="flat" cmpd="sng" algn="ctr">
+                      <a:solidFill>
+                        <a:srgbClr val="FFFFFF"/>
+                      </a:solidFill>
+                      <a:prstDash val="solid"/>
+                      <a:round/>
+                      <a:headEnd type="none" w="med" len="med"/>
+                      <a:tailEnd type="none" w="med" len="med"/>
+                    </a:lnT>
+                    <a:lnB w="9525" cap="flat" cmpd="sng" algn="ctr">
+                      <a:solidFill>
+                        <a:srgbClr val="FFFFFF"/>
+                      </a:solidFill>
+                      <a:prstDash val="solid"/>
+                      <a:round/>
+                      <a:headEnd type="none" w="med" len="med"/>
+                      <a:tailEnd type="none" w="med" len="med"/>
+                    </a:lnB>
+                    <a:solidFill>
+                      <a:srgbClr val="FDF1E9"/>
+                    </a:solidFill>
+                  </a:tcPr>
+                </a:tc>
+              </a:tr>
+              <a:tr h="228600">
+                <a:tc>
+                  <a:txBody>
+                    <a:bodyPr/>
+                    <a:lstStyle/>
+                    <a:p>
+                      <a:pPr algn="ctr" indent="0" marL="0">
+                        <a:buNone/>
+                      </a:pPr>
+                      <a:r>
+                        <a:rPr lang="en-US" sz="1000" dirty="0">
+                          <a:solidFill>
+                            <a:srgbClr val="404040"/>
+                          </a:solidFill>
+                        </a:rPr>
+                        <a:t>　其中 90～100%</a:t>
+                      </a:r>
+                      <a:endParaRPr lang="en-US" sz="1000" dirty="0"/>
+                    </a:p>
+                  </a:txBody>
+                  <a:tcPr marL="36576" marR="36576" marT="36576" marB="36576" anchor="ctr">
+                    <a:lnL w="9525" cap="flat" cmpd="sng" algn="ctr">
+                      <a:solidFill>
+                        <a:srgbClr val="FFFFFF"/>
+                      </a:solidFill>
+                      <a:prstDash val="solid"/>
+                      <a:round/>
+                      <a:headEnd type="none" w="med" len="med"/>
+                      <a:tailEnd type="none" w="med" len="med"/>
+                    </a:lnL>
+                    <a:lnR w="9525" cap="flat" cmpd="sng" algn="ctr">
+                      <a:solidFill>
+                        <a:srgbClr val="FFFFFF"/>
+                      </a:solidFill>
+                      <a:prstDash val="solid"/>
+                      <a:round/>
+                      <a:headEnd type="none" w="med" len="med"/>
+                      <a:tailEnd type="none" w="med" len="med"/>
+                    </a:lnR>
+                    <a:lnT w="9525" cap="flat" cmpd="sng" algn="ctr">
+                      <a:solidFill>
+                        <a:srgbClr val="FFFFFF"/>
+                      </a:solidFill>
+                      <a:prstDash val="solid"/>
+                      <a:round/>
+                      <a:headEnd type="none" w="med" len="med"/>
+                      <a:tailEnd type="none" w="med" len="med"/>
+                    </a:lnT>
+                    <a:lnB w="9525" cap="flat" cmpd="sng" algn="ctr">
+                      <a:solidFill>
+                        <a:srgbClr val="FFFFFF"/>
+                      </a:solidFill>
+                      <a:prstDash val="solid"/>
+                      <a:round/>
+                      <a:headEnd type="none" w="med" len="med"/>
+                      <a:tailEnd type="none" w="med" len="med"/>
+                    </a:lnB>
+                    <a:solidFill>
+                      <a:srgbClr val="FFFFFF"/>
+                    </a:solidFill>
+                  </a:tcPr>
+                </a:tc>
+                <a:tc>
+                  <a:txBody>
+                    <a:bodyPr/>
+                    <a:lstStyle/>
+                    <a:p>
+                      <a:pPr algn="ctr" indent="0" marL="0">
+                        <a:buNone/>
+                      </a:pPr>
+                      <a:r>
+                        <a:rPr lang="en-US" sz="1000" dirty="0">
+                          <a:solidFill>
+                            <a:srgbClr val="404040"/>
+                          </a:solidFill>
+                        </a:rPr>
+                        <a:t>16家</a:t>
+                      </a:r>
+                      <a:endParaRPr lang="en-US" sz="1000" dirty="0"/>
+                    </a:p>
+                  </a:txBody>
+                  <a:tcPr marL="36576" marR="36576" marT="36576" marB="36576" anchor="ctr">
+                    <a:lnL w="9525" cap="flat" cmpd="sng" algn="ctr">
+                      <a:solidFill>
+                        <a:srgbClr val="FFFFFF"/>
+                      </a:solidFill>
+                      <a:prstDash val="solid"/>
+                      <a:round/>
+                      <a:headEnd type="none" w="med" len="med"/>
+                      <a:tailEnd type="none" w="med" len="med"/>
+                    </a:lnL>
+                    <a:lnR w="9525" cap="flat" cmpd="sng" algn="ctr">
+                      <a:solidFill>
+                        <a:srgbClr val="FFFFFF"/>
+                      </a:solidFill>
+                      <a:prstDash val="solid"/>
+                      <a:round/>
+                      <a:headEnd type="none" w="med" len="med"/>
+                      <a:tailEnd type="none" w="med" len="med"/>
+                    </a:lnR>
+                    <a:lnT w="9525" cap="flat" cmpd="sng" algn="ctr">
+                      <a:solidFill>
+                        <a:srgbClr val="FFFFFF"/>
+                      </a:solidFill>
+                      <a:prstDash val="solid"/>
+                      <a:round/>
+                      <a:headEnd type="none" w="med" len="med"/>
+                      <a:tailEnd type="none" w="med" len="med"/>
+                    </a:lnT>
+                    <a:lnB w="9525" cap="flat" cmpd="sng" algn="ctr">
+                      <a:solidFill>
+                        <a:srgbClr val="FFFFFF"/>
+                      </a:solidFill>
+                      <a:prstDash val="solid"/>
+                      <a:round/>
+                      <a:headEnd type="none" w="med" len="med"/>
+                      <a:tailEnd type="none" w="med" len="med"/>
+                    </a:lnB>
+                    <a:solidFill>
+                      <a:srgbClr val="FFFFFF"/>
+                    </a:solidFill>
+                  </a:tcPr>
+                </a:tc>
+                <a:tc>
+                  <a:txBody>
+                    <a:bodyPr/>
+                    <a:lstStyle/>
+                    <a:p>
+                      <a:pPr algn="ctr" indent="0" marL="0">
+                        <a:buNone/>
+                      </a:pPr>
+                      <a:r>
+                        <a:rPr lang="en-US" sz="1000" dirty="0">
+                          <a:solidFill>
+                            <a:srgbClr val="404040"/>
+                          </a:solidFill>
+                        </a:rPr>
+                        <a:t>−1.49億</a:t>
+                      </a:r>
+                      <a:endParaRPr lang="en-US" sz="1000" dirty="0"/>
+                    </a:p>
+                  </a:txBody>
+                  <a:tcPr marL="36576" marR="36576" marT="36576" marB="36576" anchor="ctr">
+                    <a:lnL w="9525" cap="flat" cmpd="sng" algn="ctr">
+                      <a:solidFill>
+                        <a:srgbClr val="FFFFFF"/>
+                      </a:solidFill>
+                      <a:prstDash val="solid"/>
+                      <a:round/>
+                      <a:headEnd type="none" w="med" len="med"/>
+                      <a:tailEnd type="none" w="med" len="med"/>
+                    </a:lnL>
+                    <a:lnR w="9525" cap="flat" cmpd="sng" algn="ctr">
+                      <a:solidFill>
+                        <a:srgbClr val="FFFFFF"/>
+                      </a:solidFill>
+                      <a:prstDash val="solid"/>
+                      <a:round/>
+                      <a:headEnd type="none" w="med" len="med"/>
+                      <a:tailEnd type="none" w="med" len="med"/>
+                    </a:lnR>
+                    <a:lnT w="9525" cap="flat" cmpd="sng" algn="ctr">
+                      <a:solidFill>
+                        <a:srgbClr val="FFFFFF"/>
+                      </a:solidFill>
+                      <a:prstDash val="solid"/>
+                      <a:round/>
+                      <a:headEnd type="none" w="med" len="med"/>
+                      <a:tailEnd type="none" w="med" len="med"/>
+                    </a:lnT>
+                    <a:lnB w="9525" cap="flat" cmpd="sng" algn="ctr">
+                      <a:solidFill>
+                        <a:srgbClr val="FFFFFF"/>
+                      </a:solidFill>
+                      <a:prstDash val="solid"/>
+                      <a:round/>
+                      <a:headEnd type="none" w="med" len="med"/>
+                      <a:tailEnd type="none" w="med" len="med"/>
+                    </a:lnB>
+                    <a:solidFill>
+                      <a:srgbClr val="FFFFFF"/>
+                    </a:solidFill>
+                  </a:tcPr>
+                </a:tc>
+                <a:tc>
+                  <a:txBody>
+                    <a:bodyPr/>
+                    <a:lstStyle/>
+                    <a:p>
+                      <a:pPr algn="ctr" indent="0" marL="0">
+                        <a:buNone/>
+                      </a:pPr>
+                      <a:r>
+                        <a:rPr lang="en-US" sz="1000" dirty="0">
+                          <a:solidFill>
+                            <a:srgbClr val="404040"/>
+                          </a:solidFill>
+                        </a:rPr>
+                        <a:t>18%</a:t>
+                      </a:r>
+                      <a:endParaRPr lang="en-US" sz="1000" dirty="0"/>
+                    </a:p>
+                  </a:txBody>
+                  <a:tcPr marL="36576" marR="36576" marT="36576" marB="36576" anchor="ctr">
+                    <a:lnL w="9525" cap="flat" cmpd="sng" algn="ctr">
+                      <a:solidFill>
+                        <a:srgbClr val="FFFFFF"/>
+                      </a:solidFill>
+                      <a:prstDash val="solid"/>
+                      <a:round/>
+                      <a:headEnd type="none" w="med" len="med"/>
+                      <a:tailEnd type="none" w="med" len="med"/>
+                    </a:lnL>
+                    <a:lnR w="9525" cap="flat" cmpd="sng" algn="ctr">
+                      <a:solidFill>
+                        <a:srgbClr val="FFFFFF"/>
+                      </a:solidFill>
+                      <a:prstDash val="solid"/>
+                      <a:round/>
+                      <a:headEnd type="none" w="med" len="med"/>
+                      <a:tailEnd type="none" w="med" len="med"/>
+                    </a:lnR>
+                    <a:lnT w="9525" cap="flat" cmpd="sng" algn="ctr">
+                      <a:solidFill>
+                        <a:srgbClr val="FFFFFF"/>
+                      </a:solidFill>
+                      <a:prstDash val="solid"/>
+                      <a:round/>
+                      <a:headEnd type="none" w="med" len="med"/>
+                      <a:tailEnd type="none" w="med" len="med"/>
+                    </a:lnT>
+                    <a:lnB w="9525" cap="flat" cmpd="sng" algn="ctr">
+                      <a:solidFill>
+                        <a:srgbClr val="FFFFFF"/>
+                      </a:solidFill>
+                      <a:prstDash val="solid"/>
+                      <a:round/>
+                      <a:headEnd type="none" w="med" len="med"/>
+                      <a:tailEnd type="none" w="med" len="med"/>
+                    </a:lnB>
+                    <a:solidFill>
+                      <a:srgbClr val="FFFFFF"/>
+                    </a:solidFill>
+                  </a:tcPr>
+                </a:tc>
+              </a:tr>
+              <a:tr h="228600">
+                <a:tc>
+                  <a:txBody>
+                    <a:bodyPr/>
+                    <a:lstStyle/>
+                    <a:p>
+                      <a:pPr algn="ctr" indent="0" marL="0">
+                        <a:buNone/>
+                      </a:pPr>
+                      <a:r>
+                        <a:rPr lang="en-US" sz="1000" dirty="0">
+                          <a:solidFill>
+                            <a:srgbClr val="404040"/>
+                          </a:solidFill>
+                        </a:rPr>
+                        <a:t>　其中 75～90%</a:t>
+                      </a:r>
+                      <a:endParaRPr lang="en-US" sz="1000" dirty="0"/>
+                    </a:p>
+                  </a:txBody>
+                  <a:tcPr marL="36576" marR="36576" marT="36576" marB="36576" anchor="ctr">
+                    <a:lnL w="9525" cap="flat" cmpd="sng" algn="ctr">
+                      <a:solidFill>
+                        <a:srgbClr val="FFFFFF"/>
+                      </a:solidFill>
+                      <a:prstDash val="solid"/>
+                      <a:round/>
+                      <a:headEnd type="none" w="med" len="med"/>
+                      <a:tailEnd type="none" w="med" len="med"/>
+                    </a:lnL>
+                    <a:lnR w="9525" cap="flat" cmpd="sng" algn="ctr">
+                      <a:solidFill>
+                        <a:srgbClr val="FFFFFF"/>
+                      </a:solidFill>
+                      <a:prstDash val="solid"/>
+                      <a:round/>
+                      <a:headEnd type="none" w="med" len="med"/>
+                      <a:tailEnd type="none" w="med" len="med"/>
+                    </a:lnR>
+                    <a:lnT w="9525" cap="flat" cmpd="sng" algn="ctr">
+                      <a:solidFill>
+                        <a:srgbClr val="FFFFFF"/>
+                      </a:solidFill>
+                      <a:prstDash val="solid"/>
+                      <a:round/>
+                      <a:headEnd type="none" w="med" len="med"/>
+                      <a:tailEnd type="none" w="med" len="med"/>
+                    </a:lnT>
+                    <a:lnB w="9525" cap="flat" cmpd="sng" algn="ctr">
+                      <a:solidFill>
+                        <a:srgbClr val="FFFFFF"/>
+                      </a:solidFill>
+                      <a:prstDash val="solid"/>
+                      <a:round/>
+                      <a:headEnd type="none" w="med" len="med"/>
+                      <a:tailEnd type="none" w="med" len="med"/>
+                    </a:lnB>
+                    <a:solidFill>
+                      <a:srgbClr val="FDF1E9"/>
+                    </a:solidFill>
+                  </a:tcPr>
+                </a:tc>
+                <a:tc>
+                  <a:txBody>
+                    <a:bodyPr/>
+                    <a:lstStyle/>
+                    <a:p>
+                      <a:pPr algn="ctr" indent="0" marL="0">
+                        <a:buNone/>
+                      </a:pPr>
+                      <a:r>
+                        <a:rPr lang="en-US" sz="1000" dirty="0">
+                          <a:solidFill>
+                            <a:srgbClr val="404040"/>
+                          </a:solidFill>
+                        </a:rPr>
+                        <a:t>32家</a:t>
+                      </a:r>
+                      <a:endParaRPr lang="en-US" sz="1000" dirty="0"/>
+                    </a:p>
+                  </a:txBody>
+                  <a:tcPr marL="36576" marR="36576" marT="36576" marB="36576" anchor="ctr">
+                    <a:lnL w="9525" cap="flat" cmpd="sng" algn="ctr">
+                      <a:solidFill>
+                        <a:srgbClr val="FFFFFF"/>
+                      </a:solidFill>
+                      <a:prstDash val="solid"/>
+                      <a:round/>
+                      <a:headEnd type="none" w="med" len="med"/>
+                      <a:tailEnd type="none" w="med" len="med"/>
+                    </a:lnL>
+                    <a:lnR w="9525" cap="flat" cmpd="sng" algn="ctr">
+                      <a:solidFill>
+                        <a:srgbClr val="FFFFFF"/>
+                      </a:solidFill>
+                      <a:prstDash val="solid"/>
+                      <a:round/>
+                      <a:headEnd type="none" w="med" len="med"/>
+                      <a:tailEnd type="none" w="med" len="med"/>
+                    </a:lnR>
+                    <a:lnT w="9525" cap="flat" cmpd="sng" algn="ctr">
+                      <a:solidFill>
+                        <a:srgbClr val="FFFFFF"/>
+                      </a:solidFill>
+                      <a:prstDash val="solid"/>
+                      <a:round/>
+                      <a:headEnd type="none" w="med" len="med"/>
+                      <a:tailEnd type="none" w="med" len="med"/>
+                    </a:lnT>
+                    <a:lnB w="9525" cap="flat" cmpd="sng" algn="ctr">
+                      <a:solidFill>
+                        <a:srgbClr val="FFFFFF"/>
+                      </a:solidFill>
+                      <a:prstDash val="solid"/>
+                      <a:round/>
+                      <a:headEnd type="none" w="med" len="med"/>
+                      <a:tailEnd type="none" w="med" len="med"/>
+                    </a:lnB>
+                    <a:solidFill>
+                      <a:srgbClr val="FDF1E9"/>
+                    </a:solidFill>
+                  </a:tcPr>
+                </a:tc>
+                <a:tc>
+                  <a:txBody>
+                    <a:bodyPr/>
+                    <a:lstStyle/>
+                    <a:p>
+                      <a:pPr algn="ctr" indent="0" marL="0">
+                        <a:buNone/>
+                      </a:pPr>
+                      <a:r>
+                        <a:rPr lang="en-US" sz="1000" dirty="0">
+                          <a:solidFill>
+                            <a:srgbClr val="404040"/>
+                          </a:solidFill>
+                        </a:rPr>
+                        <a:t>−3.43億</a:t>
+                      </a:r>
+                      <a:endParaRPr lang="en-US" sz="1000" dirty="0"/>
+                    </a:p>
+                  </a:txBody>
+                  <a:tcPr marL="36576" marR="36576" marT="36576" marB="36576" anchor="ctr">
+                    <a:lnL w="9525" cap="flat" cmpd="sng" algn="ctr">
+                      <a:solidFill>
+                        <a:srgbClr val="FFFFFF"/>
+                      </a:solidFill>
+                      <a:prstDash val="solid"/>
+                      <a:round/>
+                      <a:headEnd type="none" w="med" len="med"/>
+                      <a:tailEnd type="none" w="med" len="med"/>
+                    </a:lnL>
+                    <a:lnR w="9525" cap="flat" cmpd="sng" algn="ctr">
+                      <a:solidFill>
+                        <a:srgbClr val="FFFFFF"/>
+                      </a:solidFill>
+                      <a:prstDash val="solid"/>
+                      <a:round/>
+                      <a:headEnd type="none" w="med" len="med"/>
+                      <a:tailEnd type="none" w="med" len="med"/>
+                    </a:lnR>
+                    <a:lnT w="9525" cap="flat" cmpd="sng" algn="ctr">
+                      <a:solidFill>
+                        <a:srgbClr val="FFFFFF"/>
+                      </a:solidFill>
+                      <a:prstDash val="solid"/>
+                      <a:round/>
+                      <a:headEnd type="none" w="med" len="med"/>
+                      <a:tailEnd type="none" w="med" len="med"/>
+                    </a:lnT>
+                    <a:lnB w="9525" cap="flat" cmpd="sng" algn="ctr">
+                      <a:solidFill>
+                        <a:srgbClr val="FFFFFF"/>
+                      </a:solidFill>
+                      <a:prstDash val="solid"/>
+                      <a:round/>
+                      <a:headEnd type="none" w="med" len="med"/>
+                      <a:tailEnd type="none" w="med" len="med"/>
+                    </a:lnB>
+                    <a:solidFill>
+                      <a:srgbClr val="FDF1E9"/>
+                    </a:solidFill>
+                  </a:tcPr>
+                </a:tc>
+                <a:tc>
+                  <a:txBody>
+                    <a:bodyPr/>
+                    <a:lstStyle/>
+                    <a:p>
+                      <a:pPr algn="ctr" indent="0" marL="0">
+                        <a:buNone/>
+                      </a:pPr>
+                      <a:r>
+                        <a:rPr lang="en-US" sz="1000" dirty="0">
+                          <a:solidFill>
+                            <a:srgbClr val="404040"/>
+                          </a:solidFill>
+                        </a:rPr>
+                        <a:t>42%</a:t>
+                      </a:r>
+                      <a:endParaRPr lang="en-US" sz="1000" dirty="0"/>
+                    </a:p>
+                  </a:txBody>
+                  <a:tcPr marL="36576" marR="36576" marT="36576" marB="36576" anchor="ctr">
+                    <a:lnL w="9525" cap="flat" cmpd="sng" algn="ctr">
+                      <a:solidFill>
+                        <a:srgbClr val="FFFFFF"/>
+                      </a:solidFill>
+                      <a:prstDash val="solid"/>
+                      <a:round/>
+                      <a:headEnd type="none" w="med" len="med"/>
+                      <a:tailEnd type="none" w="med" len="med"/>
+                    </a:lnL>
+                    <a:lnR w="9525" cap="flat" cmpd="sng" algn="ctr">
+                      <a:solidFill>
+                        <a:srgbClr val="FFFFFF"/>
+                      </a:solidFill>
+                      <a:prstDash val="solid"/>
+                      <a:round/>
+                      <a:headEnd type="none" w="med" len="med"/>
+                      <a:tailEnd type="none" w="med" len="med"/>
+                    </a:lnR>
+                    <a:lnT w="9525" cap="flat" cmpd="sng" algn="ctr">
+                      <a:solidFill>
+                        <a:srgbClr val="FFFFFF"/>
+                      </a:solidFill>
+                      <a:prstDash val="solid"/>
+                      <a:round/>
+                      <a:headEnd type="none" w="med" len="med"/>
+                      <a:tailEnd type="none" w="med" len="med"/>
+                    </a:lnT>
+                    <a:lnB w="9525" cap="flat" cmpd="sng" algn="ctr">
+                      <a:solidFill>
+                        <a:srgbClr val="FFFFFF"/>
+                      </a:solidFill>
+                      <a:prstDash val="solid"/>
+                      <a:round/>
+                      <a:headEnd type="none" w="med" len="med"/>
+                      <a:tailEnd type="none" w="med" len="med"/>
+                    </a:lnB>
+                    <a:solidFill>
+                      <a:srgbClr val="FDF1E9"/>
+                    </a:solidFill>
+                  </a:tcPr>
+                </a:tc>
+              </a:tr>
+              <a:tr h="228600">
+                <a:tc>
+                  <a:txBody>
+                    <a:bodyPr/>
+                    <a:lstStyle/>
+                    <a:p>
+                      <a:pPr algn="ctr" indent="0" marL="0">
+                        <a:buNone/>
+                      </a:pPr>
+                      <a:r>
+                        <a:rPr lang="en-US" sz="1000" dirty="0">
+                          <a:solidFill>
+                            <a:srgbClr val="404040"/>
+                          </a:solidFill>
+                        </a:rPr>
+                        <a:t>　其中 未達75%</a:t>
+                      </a:r>
+                      <a:endParaRPr lang="en-US" sz="1000" dirty="0"/>
+                    </a:p>
+                  </a:txBody>
+                  <a:tcPr marL="36576" marR="36576" marT="36576" marB="36576" anchor="ctr">
+                    <a:lnL w="9525" cap="flat" cmpd="sng" algn="ctr">
+                      <a:solidFill>
+                        <a:srgbClr val="FFFFFF"/>
+                      </a:solidFill>
+                      <a:prstDash val="solid"/>
+                      <a:round/>
+                      <a:headEnd type="none" w="med" len="med"/>
+                      <a:tailEnd type="none" w="med" len="med"/>
+                    </a:lnL>
+                    <a:lnR w="9525" cap="flat" cmpd="sng" algn="ctr">
+                      <a:solidFill>
+                        <a:srgbClr val="FFFFFF"/>
+                      </a:solidFill>
+                      <a:prstDash val="solid"/>
+                      <a:round/>
+                      <a:headEnd type="none" w="med" len="med"/>
+                      <a:tailEnd type="none" w="med" len="med"/>
+                    </a:lnR>
+                    <a:lnT w="9525" cap="flat" cmpd="sng" algn="ctr">
+                      <a:solidFill>
+                        <a:srgbClr val="FFFFFF"/>
+                      </a:solidFill>
+                      <a:prstDash val="solid"/>
+                      <a:round/>
+                      <a:headEnd type="none" w="med" len="med"/>
+                      <a:tailEnd type="none" w="med" len="med"/>
+                    </a:lnT>
+                    <a:lnB w="9525" cap="flat" cmpd="sng" algn="ctr">
+                      <a:solidFill>
+                        <a:srgbClr val="FFFFFF"/>
+                      </a:solidFill>
+                      <a:prstDash val="solid"/>
+                      <a:round/>
+                      <a:headEnd type="none" w="med" len="med"/>
+                      <a:tailEnd type="none" w="med" len="med"/>
+                    </a:lnB>
+                    <a:solidFill>
+                      <a:srgbClr val="FFFFFF"/>
+                    </a:solidFill>
+                  </a:tcPr>
+                </a:tc>
+                <a:tc>
+                  <a:txBody>
+                    <a:bodyPr/>
+                    <a:lstStyle/>
+                    <a:p>
+                      <a:pPr algn="ctr" indent="0" marL="0">
+                        <a:buNone/>
+                      </a:pPr>
+                      <a:r>
+                        <a:rPr lang="en-US" sz="1000" dirty="0">
+                          <a:solidFill>
+                            <a:srgbClr val="404040"/>
+                          </a:solidFill>
+                        </a:rPr>
+                        <a:t>18家</a:t>
+                      </a:r>
+                      <a:endParaRPr lang="en-US" sz="1000" dirty="0"/>
+                    </a:p>
+                  </a:txBody>
+                  <a:tcPr marL="36576" marR="36576" marT="36576" marB="36576" anchor="ctr">
+                    <a:lnL w="9525" cap="flat" cmpd="sng" algn="ctr">
+                      <a:solidFill>
+                        <a:srgbClr val="FFFFFF"/>
+                      </a:solidFill>
+                      <a:prstDash val="solid"/>
+                      <a:round/>
+                      <a:headEnd type="none" w="med" len="med"/>
+                      <a:tailEnd type="none" w="med" len="med"/>
+                    </a:lnL>
+                    <a:lnR w="9525" cap="flat" cmpd="sng" algn="ctr">
+                      <a:solidFill>
+                        <a:srgbClr val="FFFFFF"/>
+                      </a:solidFill>
+                      <a:prstDash val="solid"/>
+                      <a:round/>
+                      <a:headEnd type="none" w="med" len="med"/>
+                      <a:tailEnd type="none" w="med" len="med"/>
+                    </a:lnR>
+                    <a:lnT w="9525" cap="flat" cmpd="sng" algn="ctr">
+                      <a:solidFill>
+                        <a:srgbClr val="FFFFFF"/>
+                      </a:solidFill>
+                      <a:prstDash val="solid"/>
+                      <a:round/>
+                      <a:headEnd type="none" w="med" len="med"/>
+                      <a:tailEnd type="none" w="med" len="med"/>
+                    </a:lnT>
+                    <a:lnB w="9525" cap="flat" cmpd="sng" algn="ctr">
+                      <a:solidFill>
+                        <a:srgbClr val="FFFFFF"/>
+                      </a:solidFill>
+                      <a:prstDash val="solid"/>
+                      <a:round/>
+                      <a:headEnd type="none" w="med" len="med"/>
+                      <a:tailEnd type="none" w="med" len="med"/>
+                    </a:lnB>
+                    <a:solidFill>
+                      <a:srgbClr val="FFFFFF"/>
+                    </a:solidFill>
+                  </a:tcPr>
+                </a:tc>
+                <a:tc>
+                  <a:txBody>
+                    <a:bodyPr/>
+                    <a:lstStyle/>
+                    <a:p>
+                      <a:pPr algn="ctr" indent="0" marL="0">
+                        <a:buNone/>
+                      </a:pPr>
+                      <a:r>
+                        <a:rPr lang="en-US" sz="1000" dirty="0">
+                          <a:solidFill>
+                            <a:srgbClr val="404040"/>
+                          </a:solidFill>
+                        </a:rPr>
+                        <a:t>−2.18億</a:t>
+                      </a:r>
+                      <a:endParaRPr lang="en-US" sz="1000" dirty="0"/>
+                    </a:p>
+                  </a:txBody>
+                  <a:tcPr marL="36576" marR="36576" marT="36576" marB="36576" anchor="ctr">
+                    <a:lnL w="9525" cap="flat" cmpd="sng" algn="ctr">
+                      <a:solidFill>
+                        <a:srgbClr val="FFFFFF"/>
+                      </a:solidFill>
+                      <a:prstDash val="solid"/>
+                      <a:round/>
+                      <a:headEnd type="none" w="med" len="med"/>
+                      <a:tailEnd type="none" w="med" len="med"/>
+                    </a:lnL>
+                    <a:lnR w="9525" cap="flat" cmpd="sng" algn="ctr">
+                      <a:solidFill>
+                        <a:srgbClr val="FFFFFF"/>
+                      </a:solidFill>
+                      <a:prstDash val="solid"/>
+                      <a:round/>
+                      <a:headEnd type="none" w="med" len="med"/>
+                      <a:tailEnd type="none" w="med" len="med"/>
+                    </a:lnR>
+                    <a:lnT w="9525" cap="flat" cmpd="sng" algn="ctr">
+                      <a:solidFill>
+                        <a:srgbClr val="FFFFFF"/>
+                      </a:solidFill>
+                      <a:prstDash val="solid"/>
+                      <a:round/>
+                      <a:headEnd type="none" w="med" len="med"/>
+                      <a:tailEnd type="none" w="med" len="med"/>
+                    </a:lnT>
+                    <a:lnB w="9525" cap="flat" cmpd="sng" algn="ctr">
+                      <a:solidFill>
+                        <a:srgbClr val="FFFFFF"/>
+                      </a:solidFill>
+                      <a:prstDash val="solid"/>
+                      <a:round/>
+                      <a:headEnd type="none" w="med" len="med"/>
+                      <a:tailEnd type="none" w="med" len="med"/>
+                    </a:lnB>
+                    <a:solidFill>
+                      <a:srgbClr val="FFFFFF"/>
+                    </a:solidFill>
+                  </a:tcPr>
+                </a:tc>
+                <a:tc>
+                  <a:txBody>
+                    <a:bodyPr/>
+                    <a:lstStyle/>
+                    <a:p>
+                      <a:pPr algn="ctr" indent="0" marL="0">
+                        <a:buNone/>
+                      </a:pPr>
+                      <a:r>
+                        <a:rPr lang="en-US" sz="1000" dirty="0">
+                          <a:solidFill>
+                            <a:srgbClr val="404040"/>
+                          </a:solidFill>
+                        </a:rPr>
+                        <a:t>26%</a:t>
+                      </a:r>
+                      <a:endParaRPr lang="en-US" sz="1000" dirty="0"/>
+                    </a:p>
+                  </a:txBody>
+                  <a:tcPr marL="36576" marR="36576" marT="36576" marB="36576" anchor="ctr">
+                    <a:lnL w="9525" cap="flat" cmpd="sng" algn="ctr">
+                      <a:solidFill>
+                        <a:srgbClr val="FFFFFF"/>
+                      </a:solidFill>
+                      <a:prstDash val="solid"/>
+                      <a:round/>
+                      <a:headEnd type="none" w="med" len="med"/>
+                      <a:tailEnd type="none" w="med" len="med"/>
+                    </a:lnL>
+                    <a:lnR w="9525" cap="flat" cmpd="sng" algn="ctr">
+                      <a:solidFill>
+                        <a:srgbClr val="FFFFFF"/>
+                      </a:solidFill>
+                      <a:prstDash val="solid"/>
+                      <a:round/>
+                      <a:headEnd type="none" w="med" len="med"/>
+                      <a:tailEnd type="none" w="med" len="med"/>
+                    </a:lnR>
+                    <a:lnT w="9525" cap="flat" cmpd="sng" algn="ctr">
+                      <a:solidFill>
+                        <a:srgbClr val="FFFFFF"/>
+                      </a:solidFill>
+                      <a:prstDash val="solid"/>
+                      <a:round/>
+                      <a:headEnd type="none" w="med" len="med"/>
+                      <a:tailEnd type="none" w="med" len="med"/>
+                    </a:lnT>
+                    <a:lnB w="9525" cap="flat" cmpd="sng" algn="ctr">
+                      <a:solidFill>
+                        <a:srgbClr val="FFFFFF"/>
+                      </a:solidFill>
+                      <a:prstDash val="solid"/>
+                      <a:round/>
+                      <a:headEnd type="none" w="med" len="med"/>
+                      <a:tailEnd type="none" w="med" len="med"/>
+                    </a:lnB>
+                    <a:solidFill>
+                      <a:srgbClr val="FFFFFF"/>
+                    </a:solidFill>
+                  </a:tcPr>
+                </a:tc>
+              </a:tr>
+              <a:tr h="228600">
+                <a:tc>
+                  <a:txBody>
+                    <a:bodyPr/>
+                    <a:lstStyle/>
+                    <a:p>
+                      <a:pPr algn="ctr" indent="0" marL="0">
+                        <a:buNone/>
+                      </a:pPr>
+                      <a:r>
+                        <a:rPr lang="en-US" sz="1050" b="1" dirty="0">
+                          <a:solidFill>
+                            <a:srgbClr val="000000"/>
+                          </a:solidFill>
+                        </a:rPr>
+                        <a:t>合計</a:t>
+                      </a:r>
+                      <a:endParaRPr lang="en-US" sz="1050" dirty="0"/>
+                    </a:p>
+                  </a:txBody>
+                  <a:tcPr marL="36576" marR="36576" marT="36576" marB="36576" anchor="ctr">
+                    <a:lnL w="9525" cap="flat" cmpd="sng" algn="ctr">
+                      <a:solidFill>
+                        <a:srgbClr val="FFFFFF"/>
+                      </a:solidFill>
+                      <a:prstDash val="solid"/>
+                      <a:round/>
+                      <a:headEnd type="none" w="med" len="med"/>
+                      <a:tailEnd type="none" w="med" len="med"/>
+                    </a:lnL>
+                    <a:lnR w="9525" cap="flat" cmpd="sng" algn="ctr">
+                      <a:solidFill>
+                        <a:srgbClr val="FFFFFF"/>
+                      </a:solidFill>
+                      <a:prstDash val="solid"/>
+                      <a:round/>
+                      <a:headEnd type="none" w="med" len="med"/>
+                      <a:tailEnd type="none" w="med" len="med"/>
+                    </a:lnR>
+                    <a:lnT w="9525" cap="flat" cmpd="sng" algn="ctr">
+                      <a:solidFill>
+                        <a:srgbClr val="FFFFFF"/>
+                      </a:solidFill>
+                      <a:prstDash val="solid"/>
+                      <a:round/>
+                      <a:headEnd type="none" w="med" len="med"/>
+                      <a:tailEnd type="none" w="med" len="med"/>
+                    </a:lnT>
+                    <a:lnB w="9525" cap="flat" cmpd="sng" algn="ctr">
+                      <a:solidFill>
+                        <a:srgbClr val="FFFFFF"/>
+                      </a:solidFill>
+                      <a:prstDash val="solid"/>
+                      <a:round/>
+                      <a:headEnd type="none" w="med" len="med"/>
+                      <a:tailEnd type="none" w="med" len="med"/>
+                    </a:lnB>
+                    <a:solidFill>
+                      <a:srgbClr val="F2F2F2"/>
+                    </a:solidFill>
+                  </a:tcPr>
+                </a:tc>
+                <a:tc>
+                  <a:txBody>
+                    <a:bodyPr/>
+                    <a:lstStyle/>
+                    <a:p>
+                      <a:pPr algn="ctr" indent="0" marL="0">
+                        <a:buNone/>
+                      </a:pPr>
+                      <a:r>
+                        <a:rPr lang="en-US" sz="1050" b="1" dirty="0">
+                          <a:solidFill>
+                            <a:srgbClr val="000000"/>
+                          </a:solidFill>
+                        </a:rPr>
+                        <a:t>84家</a:t>
+                      </a:r>
+                      <a:endParaRPr lang="en-US" sz="1050" dirty="0"/>
+                    </a:p>
+                  </a:txBody>
+                  <a:tcPr marL="36576" marR="36576" marT="36576" marB="36576" anchor="ctr">
+                    <a:lnL w="9525" cap="flat" cmpd="sng" algn="ctr">
+                      <a:solidFill>
+                        <a:srgbClr val="FFFFFF"/>
+                      </a:solidFill>
+                      <a:prstDash val="solid"/>
+                      <a:round/>
+                      <a:headEnd type="none" w="med" len="med"/>
+                      <a:tailEnd type="none" w="med" len="med"/>
+                    </a:lnL>
+                    <a:lnR w="9525" cap="flat" cmpd="sng" algn="ctr">
+                      <a:solidFill>
+                        <a:srgbClr val="FFFFFF"/>
+                      </a:solidFill>
+                      <a:prstDash val="solid"/>
+                      <a:round/>
+                      <a:headEnd type="none" w="med" len="med"/>
+                      <a:tailEnd type="none" w="med" len="med"/>
+                    </a:lnR>
+                    <a:lnT w="9525" cap="flat" cmpd="sng" algn="ctr">
+                      <a:solidFill>
+                        <a:srgbClr val="FFFFFF"/>
+                      </a:solidFill>
+                      <a:prstDash val="solid"/>
+                      <a:round/>
+                      <a:headEnd type="none" w="med" len="med"/>
+                      <a:tailEnd type="none" w="med" len="med"/>
+                    </a:lnT>
+                    <a:lnB w="9525" cap="flat" cmpd="sng" algn="ctr">
+                      <a:solidFill>
+                        <a:srgbClr val="FFFFFF"/>
+                      </a:solidFill>
+                      <a:prstDash val="solid"/>
+                      <a:round/>
+                      <a:headEnd type="none" w="med" len="med"/>
+                      <a:tailEnd type="none" w="med" len="med"/>
+                    </a:lnB>
+                    <a:solidFill>
+                      <a:srgbClr val="F2F2F2"/>
+                    </a:solidFill>
+                  </a:tcPr>
+                </a:tc>
+                <a:tc>
+                  <a:txBody>
+                    <a:bodyPr/>
+                    <a:lstStyle/>
+                    <a:p>
+                      <a:pPr algn="ctr" indent="0" marL="0">
+                        <a:buNone/>
+                      </a:pPr>
+                      <a:r>
+                        <a:rPr lang="en-US" sz="1050" b="1" dirty="0">
+                          <a:solidFill>
+                            <a:srgbClr val="000000"/>
+                          </a:solidFill>
+                        </a:rPr>
+                        <a:t>−8.23億</a:t>
+                      </a:r>
+                      <a:endParaRPr lang="en-US" sz="1050" dirty="0"/>
+                    </a:p>
+                  </a:txBody>
+                  <a:tcPr marL="36576" marR="36576" marT="36576" marB="36576" anchor="ctr">
+                    <a:lnL w="9525" cap="flat" cmpd="sng" algn="ctr">
+                      <a:solidFill>
+                        <a:srgbClr val="FFFFFF"/>
+                      </a:solidFill>
+                      <a:prstDash val="solid"/>
+                      <a:round/>
+                      <a:headEnd type="none" w="med" len="med"/>
+                      <a:tailEnd type="none" w="med" len="med"/>
+                    </a:lnL>
+                    <a:lnR w="9525" cap="flat" cmpd="sng" algn="ctr">
+                      <a:solidFill>
+                        <a:srgbClr val="FFFFFF"/>
+                      </a:solidFill>
+                      <a:prstDash val="solid"/>
+                      <a:round/>
+                      <a:headEnd type="none" w="med" len="med"/>
+                      <a:tailEnd type="none" w="med" len="med"/>
+                    </a:lnR>
+                    <a:lnT w="9525" cap="flat" cmpd="sng" algn="ctr">
+                      <a:solidFill>
+                        <a:srgbClr val="FFFFFF"/>
+                      </a:solidFill>
+                      <a:prstDash val="solid"/>
+                      <a:round/>
+                      <a:headEnd type="none" w="med" len="med"/>
+                      <a:tailEnd type="none" w="med" len="med"/>
+                    </a:lnT>
+                    <a:lnB w="9525" cap="flat" cmpd="sng" algn="ctr">
+                      <a:solidFill>
+                        <a:srgbClr val="FFFFFF"/>
+                      </a:solidFill>
+                      <a:prstDash val="solid"/>
+                      <a:round/>
+                      <a:headEnd type="none" w="med" len="med"/>
+                      <a:tailEnd type="none" w="med" len="med"/>
+                    </a:lnB>
+                    <a:solidFill>
+                      <a:srgbClr val="F2F2F2"/>
+                    </a:solidFill>
+                  </a:tcPr>
+                </a:tc>
+                <a:tc>
+                  <a:txBody>
+                    <a:bodyPr/>
+                    <a:lstStyle/>
+                    <a:p>
+                      <a:pPr algn="ctr" indent="0" marL="0">
+                        <a:buNone/>
+                      </a:pPr>
+                      <a:r>
+                        <a:rPr lang="en-US" sz="1050" b="1" dirty="0">
+                          <a:solidFill>
+                            <a:srgbClr val="000000"/>
+                          </a:solidFill>
+                        </a:rPr>
+                        <a:t>100%</a:t>
+                      </a:r>
+                      <a:endParaRPr lang="en-US" sz="1050" dirty="0"/>
+                    </a:p>
+                  </a:txBody>
+                  <a:tcPr marL="36576" marR="36576" marT="36576" marB="36576" anchor="ctr">
+                    <a:lnL w="9525" cap="flat" cmpd="sng" algn="ctr">
+                      <a:solidFill>
+                        <a:srgbClr val="FFFFFF"/>
+                      </a:solidFill>
+                      <a:prstDash val="solid"/>
+                      <a:round/>
+                      <a:headEnd type="none" w="med" len="med"/>
+                      <a:tailEnd type="none" w="med" len="med"/>
+                    </a:lnL>
+                    <a:lnR w="9525" cap="flat" cmpd="sng" algn="ctr">
+                      <a:solidFill>
+                        <a:srgbClr val="FFFFFF"/>
+                      </a:solidFill>
+                      <a:prstDash val="solid"/>
+                      <a:round/>
+                      <a:headEnd type="none" w="med" len="med"/>
+                      <a:tailEnd type="none" w="med" len="med"/>
+                    </a:lnR>
+                    <a:lnT w="9525" cap="flat" cmpd="sng" algn="ctr">
+                      <a:solidFill>
+                        <a:srgbClr val="FFFFFF"/>
+                      </a:solidFill>
+                      <a:prstDash val="solid"/>
+                      <a:round/>
+                      <a:headEnd type="none" w="med" len="med"/>
+                      <a:tailEnd type="none" w="med" len="med"/>
+                    </a:lnT>
+                    <a:lnB w="9525" cap="flat" cmpd="sng" algn="ctr">
+                      <a:solidFill>
+                        <a:srgbClr val="FFFFFF"/>
+                      </a:solidFill>
+                      <a:prstDash val="solid"/>
+                      <a:round/>
+                      <a:headEnd type="none" w="med" len="med"/>
+                      <a:tailEnd type="none" w="med" len="med"/>
+                    </a:lnB>
+                    <a:solidFill>
+                      <a:srgbClr val="F2F2F2"/>
+                    </a:solidFill>
+                  </a:tcPr>
+                </a:tc>
+              </a:tr>
+            </a:tbl>
+          </a:graphicData>
+        </a:graphic>
+      </p:graphicFrame>
       <p:sp>
         <p:nvSpPr>
           <p:cNvPr id="25" name="Slide Number Placeholder 0"/>
